--- a/Science_Teesside/Teaching_Packs/BUILD/lessons/W4B/BUILD_Science_Autumn1_W4B_Muscle_Model.pptx
+++ b/Science_Teesside/Teaching_Packs/BUILD/lessons/W4B/BUILD_Science_Autumn1_W4B_Muscle_Model.pptx
@@ -2,22 +2,22 @@
 <file path=ppt/presentation.xml><?xml version="1.0" encoding="utf-8"?>
 <p:presentation xmlns:p="http://schemas.openxmlformats.org/presentationml/2006/main">
   <p:sldMasterIdLst>
-    <p:sldMasterId xmlns:r="http://schemas.openxmlformats.org/officeDocument/2006/relationships" id="2147483648" r:id="Rf6647c5bf2b24eab"/>
+    <p:sldMasterId xmlns:r="http://schemas.openxmlformats.org/officeDocument/2006/relationships" id="2147483648" r:id="R5388b1e0378d4017"/>
   </p:sldMasterIdLst>
   <p:notesMasterIdLst>
-    <p:notesMasterId xmlns:r="http://schemas.openxmlformats.org/officeDocument/2006/relationships" r:id="Ref247ddd8c524fc9"/>
+    <p:notesMasterId xmlns:r="http://schemas.openxmlformats.org/officeDocument/2006/relationships" r:id="R8a81304b54d84b79"/>
   </p:notesMasterIdLst>
   <p:sldIdLst>
-    <p:sldId xmlns:r="http://schemas.openxmlformats.org/officeDocument/2006/relationships" id="256" r:id="R10ae7f0187474827"/>
-    <p:sldId xmlns:r="http://schemas.openxmlformats.org/officeDocument/2006/relationships" id="257" r:id="R980da1553b3949b1"/>
-    <p:sldId xmlns:r="http://schemas.openxmlformats.org/officeDocument/2006/relationships" id="258" r:id="Rdd6f6607d2df44f9"/>
-    <p:sldId xmlns:r="http://schemas.openxmlformats.org/officeDocument/2006/relationships" id="259" r:id="Ra2d7feaa5b644889"/>
-    <p:sldId xmlns:r="http://schemas.openxmlformats.org/officeDocument/2006/relationships" id="260" r:id="R022c9974456b439a"/>
-    <p:sldId xmlns:r="http://schemas.openxmlformats.org/officeDocument/2006/relationships" id="261" r:id="R44ba616e402f4c5d"/>
-    <p:sldId xmlns:r="http://schemas.openxmlformats.org/officeDocument/2006/relationships" id="262" r:id="R5e14207dc4eb4fa1"/>
-    <p:sldId xmlns:r="http://schemas.openxmlformats.org/officeDocument/2006/relationships" id="263" r:id="R3d0f1680d0c34e04"/>
-    <p:sldId xmlns:r="http://schemas.openxmlformats.org/officeDocument/2006/relationships" id="264" r:id="Rf5f4c9b809a64500"/>
-    <p:sldId xmlns:r="http://schemas.openxmlformats.org/officeDocument/2006/relationships" id="265" r:id="R25bb71bbe3d54853"/>
+    <p:sldId xmlns:r="http://schemas.openxmlformats.org/officeDocument/2006/relationships" id="256" r:id="Rd5c88ce9fd134a56"/>
+    <p:sldId xmlns:r="http://schemas.openxmlformats.org/officeDocument/2006/relationships" id="257" r:id="Rbcc1a5a6f89641de"/>
+    <p:sldId xmlns:r="http://schemas.openxmlformats.org/officeDocument/2006/relationships" id="258" r:id="R49ce67a062a34c21"/>
+    <p:sldId xmlns:r="http://schemas.openxmlformats.org/officeDocument/2006/relationships" id="259" r:id="Rd329a0a948424ba6"/>
+    <p:sldId xmlns:r="http://schemas.openxmlformats.org/officeDocument/2006/relationships" id="260" r:id="R13ce1574f24c4e1d"/>
+    <p:sldId xmlns:r="http://schemas.openxmlformats.org/officeDocument/2006/relationships" id="261" r:id="R2c80f7d72a534264"/>
+    <p:sldId xmlns:r="http://schemas.openxmlformats.org/officeDocument/2006/relationships" id="262" r:id="Rf447a71bfd1e4b57"/>
+    <p:sldId xmlns:r="http://schemas.openxmlformats.org/officeDocument/2006/relationships" id="263" r:id="R053bb62336d74d88"/>
+    <p:sldId xmlns:r="http://schemas.openxmlformats.org/officeDocument/2006/relationships" id="264" r:id="Rc0745252c71a4d6b"/>
+    <p:sldId xmlns:r="http://schemas.openxmlformats.org/officeDocument/2006/relationships" id="265" r:id="R791c89ee8b104ef1"/>
   </p:sldIdLst>
   <p:sldSz cx="12192000" cy="6858000"/>
   <p:notesSz cx="6858000" cy="9144000"/>
@@ -499,6 +499,15 @@
               <a:t>[/Sources]</a:t>
             </a:r>
           </a:p>
+          <a:p xmlns:a="http://schemas.openxmlformats.org/drawingml/2006/main">
+            <a:r>
+              <a:t>
+[Sources]
+https://madebymatt.uk/Lessons/Science_Teesside/Teaching_Packs/BUILD/ — original lesson text, timings and teacher notes retained.
+https://madebymatt.uk/Lessons/Science_Teesside/Build/ — existing Made by Matt scientific artwork, where shown.
+[/Sources]</a:t>
+            </a:r>
+          </a:p>
         </p:txBody>
       </p:sp>
       <p:sp>
@@ -614,6 +623,15 @@
               <a:t>[/Sources]</a:t>
             </a:r>
           </a:p>
+          <a:p xmlns:a="http://schemas.openxmlformats.org/drawingml/2006/main">
+            <a:r>
+              <a:t>
+[Sources]
+https://madebymatt.uk/Lessons/Science_Teesside/Teaching_Packs/BUILD/ — original lesson text, timings and teacher notes retained.
+https://madebymatt.uk/Lessons/Science_Teesside/Build/ — existing Made by Matt scientific artwork, where shown.
+[/Sources]</a:t>
+            </a:r>
+          </a:p>
         </p:txBody>
       </p:sp>
       <p:sp>
@@ -729,6 +747,15 @@
               <a:t>[/Sources]</a:t>
             </a:r>
           </a:p>
+          <a:p xmlns:a="http://schemas.openxmlformats.org/drawingml/2006/main">
+            <a:r>
+              <a:t>
+[Sources]
+https://madebymatt.uk/Lessons/Science_Teesside/Teaching_Packs/BUILD/ — original lesson text, timings and teacher notes retained.
+https://madebymatt.uk/Lessons/Science_Teesside/Build/ — existing Made by Matt scientific artwork, where shown.
+[/Sources]</a:t>
+            </a:r>
+          </a:p>
         </p:txBody>
       </p:sp>
       <p:sp>
@@ -844,6 +871,15 @@
               <a:t>[/Sources]</a:t>
             </a:r>
           </a:p>
+          <a:p xmlns:a="http://schemas.openxmlformats.org/drawingml/2006/main">
+            <a:r>
+              <a:t>
+[Sources]
+https://madebymatt.uk/Lessons/Science_Teesside/Teaching_Packs/BUILD/ — original lesson text, timings and teacher notes retained.
+https://madebymatt.uk/Lessons/Science_Teesside/Build/ — existing Made by Matt scientific artwork, where shown.
+[/Sources]</a:t>
+            </a:r>
+          </a:p>
         </p:txBody>
       </p:sp>
       <p:sp>
@@ -959,6 +995,15 @@
               <a:t>[/Sources]</a:t>
             </a:r>
           </a:p>
+          <a:p xmlns:a="http://schemas.openxmlformats.org/drawingml/2006/main">
+            <a:r>
+              <a:t>
+[Sources]
+https://madebymatt.uk/Lessons/Science_Teesside/Teaching_Packs/BUILD/ — original lesson text, timings and teacher notes retained.
+https://madebymatt.uk/Lessons/Science_Teesside/Build/ — existing Made by Matt scientific artwork, where shown.
+[/Sources]</a:t>
+            </a:r>
+          </a:p>
         </p:txBody>
       </p:sp>
       <p:sp>
@@ -1074,6 +1119,15 @@
               <a:t>[/Sources]</a:t>
             </a:r>
           </a:p>
+          <a:p xmlns:a="http://schemas.openxmlformats.org/drawingml/2006/main">
+            <a:r>
+              <a:t>
+[Sources]
+https://madebymatt.uk/Lessons/Science_Teesside/Teaching_Packs/BUILD/ — original lesson text, timings and teacher notes retained.
+https://madebymatt.uk/Lessons/Science_Teesside/Build/ — existing Made by Matt scientific artwork, where shown.
+[/Sources]</a:t>
+            </a:r>
+          </a:p>
         </p:txBody>
       </p:sp>
       <p:sp>
@@ -1189,6 +1243,15 @@
               <a:t>[/Sources]</a:t>
             </a:r>
           </a:p>
+          <a:p xmlns:a="http://schemas.openxmlformats.org/drawingml/2006/main">
+            <a:r>
+              <a:t>
+[Sources]
+https://madebymatt.uk/Lessons/Science_Teesside/Teaching_Packs/BUILD/ — original lesson text, timings and teacher notes retained.
+https://madebymatt.uk/Lessons/Science_Teesside/Build/ — existing Made by Matt scientific artwork, where shown.
+[/Sources]</a:t>
+            </a:r>
+          </a:p>
         </p:txBody>
       </p:sp>
       <p:sp>
@@ -1304,6 +1367,15 @@
               <a:t>[/Sources]</a:t>
             </a:r>
           </a:p>
+          <a:p xmlns:a="http://schemas.openxmlformats.org/drawingml/2006/main">
+            <a:r>
+              <a:t>
+[Sources]
+https://madebymatt.uk/Lessons/Science_Teesside/Teaching_Packs/BUILD/ — original lesson text, timings and teacher notes retained.
+https://madebymatt.uk/Lessons/Science_Teesside/Build/ — existing Made by Matt scientific artwork, where shown.
+[/Sources]</a:t>
+            </a:r>
+          </a:p>
         </p:txBody>
       </p:sp>
       <p:sp>
@@ -1419,6 +1491,15 @@
               <a:t>[/Sources]</a:t>
             </a:r>
           </a:p>
+          <a:p xmlns:a="http://schemas.openxmlformats.org/drawingml/2006/main">
+            <a:r>
+              <a:t>
+[Sources]
+https://madebymatt.uk/Lessons/Science_Teesside/Teaching_Packs/BUILD/ — original lesson text, timings and teacher notes retained.
+https://madebymatt.uk/Lessons/Science_Teesside/Build/ — existing Made by Matt scientific artwork, where shown.
+[/Sources]</a:t>
+            </a:r>
+          </a:p>
         </p:txBody>
       </p:sp>
       <p:sp>
@@ -1532,6 +1613,15 @@
           <a:p xmlns:a="http://schemas.openxmlformats.org/drawingml/2006/main">
             <a:r>
               <a:t>[/Sources]</a:t>
+            </a:r>
+          </a:p>
+          <a:p xmlns:a="http://schemas.openxmlformats.org/drawingml/2006/main">
+            <a:r>
+              <a:t>
+[Sources]
+https://madebymatt.uk/Lessons/Science_Teesside/Teaching_Packs/BUILD/ — original lesson text, timings and teacher notes retained.
+https://madebymatt.uk/Lessons/Science_Teesside/Build/ — existing Made by Matt scientific artwork, where shown.
+[/Sources]</a:t>
             </a:r>
           </a:p>
         </p:txBody>
@@ -1599,7 +1689,7 @@
   </p:cSld>
   <p:clrMap bg1="lt1" tx1="dk1" bg2="lt2" tx2="dk2" accent1="accent1" accent2="accent2" accent3="accent3" accent4="accent4" accent5="accent5" accent6="accent6" hlink="hlink" folHlink="folHlink"/>
   <p:sldLayoutIdLst>
-    <p:sldLayoutId xmlns:r="http://schemas.openxmlformats.org/officeDocument/2006/relationships" id="2147483649" r:id="Rc1831fb88f044738"/>
+    <p:sldLayoutId xmlns:r="http://schemas.openxmlformats.org/officeDocument/2006/relationships" id="2147483649" r:id="R5accb81a87d449aa"/>
   </p:sldLayoutIdLst>
   <p:txStyles>
     <p:titleStyle>
@@ -2132,7 +2222,7 @@
     <p:bg>
       <p:bgPr>
         <a:solidFill xmlns:a="http://schemas.openxmlformats.org/drawingml/2006/main">
-          <a:srgbClr val="F5F1E8"/>
+          <a:srgbClr val="FBF9F3"/>
         </a:solidFill>
       </p:bgPr>
     </p:bg>
@@ -2161,8 +2251,8 @@
         </p:nvSpPr>
         <p:spPr>
           <a:xfrm xmlns:a="http://schemas.openxmlformats.org/drawingml/2006/main">
-            <a:off x="609600" y="552450"/>
-            <a:ext cx="781050" cy="57150"/>
+            <a:off x="609600" y="742950"/>
+            <a:ext cx="9906000" cy="38100"/>
           </a:xfrm>
           <a:prstGeom xmlns:a="http://schemas.openxmlformats.org/drawingml/2006/main" prst="rect">
             <a:avLst/>
@@ -2192,8 +2282,8 @@
         </p:nvSpPr>
         <p:spPr>
           <a:xfrm xmlns:a="http://schemas.openxmlformats.org/drawingml/2006/main">
-            <a:off x="609600" y="762000"/>
-            <a:ext cx="9334500" cy="285750"/>
+            <a:off x="609600" y="342900"/>
+            <a:ext cx="9334500" cy="266700"/>
           </a:xfrm>
           <a:prstGeom xmlns:a="http://schemas.openxmlformats.org/drawingml/2006/main" prst="rect">
             <a:avLst/>
@@ -2205,21 +2295,30 @@
           </a:ln>
         </p:spPr>
         <p:txBody>
-          <a:bodyPr xmlns:a="http://schemas.openxmlformats.org/drawingml/2006/main" lIns="0" tIns="0" rIns="0" bIns="0" anchor="ctr"/>
+          <a:bodyPr xmlns:a="http://schemas.openxmlformats.org/drawingml/2006/main" wrap="square" lIns="0" tIns="0" rIns="0" bIns="0" anchor="ctr">
+            <a:noAutofit/>
+          </a:bodyPr>
           <a:lstStyle xmlns:a="http://schemas.openxmlformats.org/drawingml/2006/main"/>
           <a:p xmlns:a="http://schemas.openxmlformats.org/drawingml/2006/main">
             <a:pPr>
-              <a:defRPr sz="1500" b="1">
+              <a:buNone/>
+              <a:defRPr sz="1425" b="1">
                 <a:solidFill>
                   <a:srgbClr val="28685E"/>
                 </a:solidFill>
+                <a:latin typeface="Arial"/>
+                <a:ea typeface="Arial"/>
+                <a:cs typeface="Arial"/>
               </a:defRPr>
             </a:pPr>
             <a:r>
-              <a:rPr sz="1500" b="1">
+              <a:rPr sz="1425" b="1">
                 <a:solidFill>
                   <a:srgbClr val="28685E"/>
                 </a:solidFill>
+                <a:latin typeface="Arial"/>
+                <a:ea typeface="Arial"/>
+                <a:cs typeface="Arial"/>
               </a:rPr>
               <a:t>MADE BY MATT  /  BUILD SCIENCE</a:t>
             </a:r>
@@ -2228,14 +2327,14 @@
       </p:sp>
       <p:pic>
         <p:nvPicPr>
-          <p:cNvPr id="12" name=""/>
+          <p:cNvPr id="15" name=""/>
           <p:cNvPicPr>
             <a:picLocks xmlns:a="http://schemas.openxmlformats.org/drawingml/2006/main" noChangeAspect="1"/>
           </p:cNvPicPr>
           <p:nvPr/>
         </p:nvPicPr>
         <p:blipFill>
-          <a:blip xmlns:r="http://schemas.openxmlformats.org/officeDocument/2006/relationships" xmlns:a="http://schemas.openxmlformats.org/drawingml/2006/main" r:embed="Rd13d0d3b431143f9"/>
+          <a:blip xmlns:r="http://schemas.openxmlformats.org/officeDocument/2006/relationships" xmlns:a="http://schemas.openxmlformats.org/drawingml/2006/main" r:embed="R03e9fea4c3804e86"/>
           <a:stretch xmlns:a="http://schemas.openxmlformats.org/drawingml/2006/main"/>
         </p:blipFill>
         <p:spPr>
@@ -2264,8 +2363,8 @@
         </p:nvSpPr>
         <p:spPr>
           <a:xfrm xmlns:a="http://schemas.openxmlformats.org/drawingml/2006/main">
-            <a:off x="609600" y="1352550"/>
-            <a:ext cx="10972800" cy="952500"/>
+            <a:off x="609600" y="1047750"/>
+            <a:ext cx="10972800" cy="895350"/>
           </a:xfrm>
           <a:prstGeom xmlns:a="http://schemas.openxmlformats.org/drawingml/2006/main" prst="rect">
             <a:avLst/>
@@ -2277,21 +2376,30 @@
           </a:ln>
         </p:spPr>
         <p:txBody>
-          <a:bodyPr xmlns:a="http://schemas.openxmlformats.org/drawingml/2006/main" lIns="0" tIns="0" rIns="0" bIns="0" anchor="ctr"/>
+          <a:bodyPr xmlns:a="http://schemas.openxmlformats.org/drawingml/2006/main" wrap="square" lIns="0" tIns="0" rIns="0" bIns="0" anchor="ctr">
+            <a:noAutofit/>
+          </a:bodyPr>
           <a:lstStyle xmlns:a="http://schemas.openxmlformats.org/drawingml/2006/main"/>
           <a:p xmlns:a="http://schemas.openxmlformats.org/drawingml/2006/main">
             <a:pPr>
-              <a:defRPr sz="3750" b="1">
+              <a:buNone/>
+              <a:defRPr sz="3600" b="1">
                 <a:solidFill>
                   <a:srgbClr val="152B3A"/>
                 </a:solidFill>
+                <a:latin typeface="Arial"/>
+                <a:ea typeface="Arial"/>
+                <a:cs typeface="Arial"/>
               </a:defRPr>
             </a:pPr>
             <a:r>
-              <a:rPr sz="3750" b="1">
+              <a:rPr sz="3600" b="1">
                 <a:solidFill>
                   <a:srgbClr val="152B3A"/>
                 </a:solidFill>
+                <a:latin typeface="Arial"/>
+                <a:ea typeface="Arial"/>
+                <a:cs typeface="Arial"/>
               </a:rPr>
               <a:t>Build and test a muscle model</a:t>
             </a:r>
@@ -2358,21 +2466,30 @@
           </a:ln>
         </p:spPr>
         <p:txBody>
-          <a:bodyPr xmlns:a="http://schemas.openxmlformats.org/drawingml/2006/main" lIns="0" tIns="0" rIns="0" bIns="0" anchor="ctr"/>
+          <a:bodyPr xmlns:a="http://schemas.openxmlformats.org/drawingml/2006/main" wrap="square" lIns="0" tIns="0" rIns="0" bIns="0" anchor="ctr">
+            <a:noAutofit/>
+          </a:bodyPr>
           <a:lstStyle xmlns:a="http://schemas.openxmlformats.org/drawingml/2006/main"/>
           <a:p xmlns:a="http://schemas.openxmlformats.org/drawingml/2006/main">
             <a:pPr>
-              <a:defRPr sz="1275" b="0">
+              <a:buNone/>
+              <a:defRPr sz="1200" b="0">
                 <a:solidFill>
                   <a:srgbClr val="50616B"/>
                 </a:solidFill>
+                <a:latin typeface="Arial"/>
+                <a:ea typeface="Arial"/>
+                <a:cs typeface="Arial"/>
               </a:defRPr>
             </a:pPr>
             <a:r>
-              <a:rPr sz="1275" b="0">
+              <a:rPr sz="1200" b="0">
                 <a:solidFill>
                   <a:srgbClr val="50616B"/>
                 </a:solidFill>
+                <a:latin typeface="Arial"/>
+                <a:ea typeface="Arial"/>
+                <a:cs typeface="Arial"/>
               </a:rPr>
               <a:t>AUTUMN 1  ·  WEEK 4  ·  LESSON B</a:t>
             </a:r>
@@ -2408,14 +2525,20 @@
           </a:ln>
         </p:spPr>
         <p:txBody>
-          <a:bodyPr xmlns:a="http://schemas.openxmlformats.org/drawingml/2006/main" lIns="0" tIns="0" rIns="0" bIns="0" anchor="ctr"/>
+          <a:bodyPr xmlns:a="http://schemas.openxmlformats.org/drawingml/2006/main" wrap="square" lIns="0" tIns="0" rIns="0" bIns="0" anchor="ctr">
+            <a:noAutofit/>
+          </a:bodyPr>
           <a:lstStyle xmlns:a="http://schemas.openxmlformats.org/drawingml/2006/main"/>
           <a:p xmlns:a="http://schemas.openxmlformats.org/drawingml/2006/main">
             <a:pPr>
+              <a:buNone/>
               <a:defRPr sz="1350" b="1">
                 <a:solidFill>
                   <a:srgbClr val="28685E"/>
                 </a:solidFill>
+                <a:latin typeface="Arial"/>
+                <a:ea typeface="Arial"/>
+                <a:cs typeface="Arial"/>
               </a:defRPr>
             </a:pPr>
             <a:r>
@@ -2423,6 +2546,9 @@
                 <a:solidFill>
                   <a:srgbClr val="28685E"/>
                 </a:solidFill>
+                <a:latin typeface="Arial"/>
+                <a:ea typeface="Arial"/>
+                <a:cs typeface="Arial"/>
               </a:rPr>
               <a:t>01</a:t>
             </a:r>
@@ -2445,8 +2571,8 @@
         </p:nvSpPr>
         <p:spPr>
           <a:xfrm xmlns:a="http://schemas.openxmlformats.org/drawingml/2006/main">
-            <a:off x="609600" y="2809875"/>
-            <a:ext cx="10668000" cy="1000125"/>
+            <a:off x="609600" y="2400300"/>
+            <a:ext cx="6191250" cy="1409700"/>
           </a:xfrm>
           <a:prstGeom xmlns:a="http://schemas.openxmlformats.org/drawingml/2006/main" prst="rect">
             <a:avLst/>
@@ -2458,21 +2584,30 @@
           </a:ln>
         </p:spPr>
         <p:txBody>
-          <a:bodyPr xmlns:a="http://schemas.openxmlformats.org/drawingml/2006/main" lIns="0" tIns="0" rIns="0" bIns="0" anchor="ctr"/>
+          <a:bodyPr xmlns:a="http://schemas.openxmlformats.org/drawingml/2006/main" wrap="square" lIns="0" tIns="0" rIns="0" bIns="0" anchor="ctr">
+            <a:noAutofit/>
+          </a:bodyPr>
           <a:lstStyle xmlns:a="http://schemas.openxmlformats.org/drawingml/2006/main"/>
           <a:p xmlns:a="http://schemas.openxmlformats.org/drawingml/2006/main">
             <a:pPr>
-              <a:defRPr sz="3900" b="1">
+              <a:buNone/>
+              <a:defRPr sz="3450" b="1">
                 <a:solidFill>
                   <a:srgbClr val="28685E"/>
                 </a:solidFill>
+                <a:latin typeface="Arial"/>
+                <a:ea typeface="Arial"/>
+                <a:cs typeface="Arial"/>
               </a:defRPr>
             </a:pPr>
             <a:r>
-              <a:rPr sz="3900" b="1">
+              <a:rPr sz="3450" b="1">
                 <a:solidFill>
                   <a:srgbClr val="28685E"/>
                 </a:solidFill>
+                <a:latin typeface="Arial"/>
+                <a:ea typeface="Arial"/>
+                <a:cs typeface="Arial"/>
               </a:rPr>
               <a:t>A model you can explain.</a:t>
             </a:r>
@@ -2495,8 +2630,8 @@
         </p:nvSpPr>
         <p:spPr>
           <a:xfrm xmlns:a="http://schemas.openxmlformats.org/drawingml/2006/main">
-            <a:off x="609600" y="4143375"/>
-            <a:ext cx="10668000" cy="1143000"/>
+            <a:off x="609600" y="4286250"/>
+            <a:ext cx="6667500" cy="1314450"/>
           </a:xfrm>
           <a:prstGeom xmlns:a="http://schemas.openxmlformats.org/drawingml/2006/main" prst="rect">
             <a:avLst/>
@@ -2508,27 +2643,58 @@
           </a:ln>
         </p:spPr>
         <p:txBody>
-          <a:bodyPr xmlns:a="http://schemas.openxmlformats.org/drawingml/2006/main" lIns="0" tIns="0" rIns="0" bIns="0" anchor="ctr"/>
+          <a:bodyPr xmlns:a="http://schemas.openxmlformats.org/drawingml/2006/main" wrap="square" lIns="0" tIns="0" rIns="0" bIns="0" anchor="ctr">
+            <a:noAutofit/>
+          </a:bodyPr>
           <a:lstStyle xmlns:a="http://schemas.openxmlformats.org/drawingml/2006/main"/>
           <a:p xmlns:a="http://schemas.openxmlformats.org/drawingml/2006/main">
             <a:pPr>
-              <a:defRPr sz="2550" b="0">
+              <a:buNone/>
+              <a:defRPr sz="2400" b="0">
                 <a:solidFill>
                   <a:srgbClr val="152B3A"/>
                 </a:solidFill>
+                <a:latin typeface="Arial"/>
+                <a:ea typeface="Arial"/>
+                <a:cs typeface="Arial"/>
               </a:defRPr>
             </a:pPr>
             <a:r>
-              <a:rPr sz="2550" b="0">
+              <a:rPr sz="2400" b="0">
                 <a:solidFill>
                   <a:srgbClr val="152B3A"/>
                 </a:solidFill>
+                <a:latin typeface="Arial"/>
+                <a:ea typeface="Arial"/>
+                <a:cs typeface="Arial"/>
               </a:rPr>
               <a:t>I can use the pair labels to explain two movements.</a:t>
             </a:r>
           </a:p>
         </p:txBody>
       </p:sp>
+      <p:pic>
+        <p:nvPicPr>
+          <p:cNvPr id="22" name=""/>
+          <p:cNvPicPr>
+            <a:picLocks xmlns:a="http://schemas.openxmlformats.org/drawingml/2006/main" noChangeAspect="1"/>
+          </p:cNvPicPr>
+          <p:nvPr/>
+        </p:nvPicPr>
+        <p:blipFill>
+          <a:blip xmlns:r="http://schemas.openxmlformats.org/officeDocument/2006/relationships" xmlns:a="http://schemas.openxmlformats.org/drawingml/2006/main" r:embed="Rc623c0600f284ec3"/>
+          <a:stretch xmlns:a="http://schemas.openxmlformats.org/drawingml/2006/main"/>
+        </p:blipFill>
+        <p:spPr>
+          <a:xfrm xmlns:a="http://schemas.openxmlformats.org/drawingml/2006/main">
+            <a:off x="7620000" y="2369344"/>
+            <a:ext cx="3714750" cy="2786063"/>
+          </a:xfrm>
+          <a:prstGeom xmlns:a="http://schemas.openxmlformats.org/drawingml/2006/main" prst="rect">
+            <a:avLst/>
+          </a:prstGeom>
+        </p:spPr>
+      </p:pic>
     </p:spTree>
     <p:extLst>
       <p:ext uri="{BB962C8B-B14F-4D97-AF65-F5344CB8AC3E}">
@@ -2545,7 +2711,7 @@
     <p:bg>
       <p:bgPr>
         <a:solidFill xmlns:a="http://schemas.openxmlformats.org/drawingml/2006/main">
-          <a:srgbClr val="F5F1E8"/>
+          <a:srgbClr val="FBF9F3"/>
         </a:solidFill>
       </p:bgPr>
     </p:bg>
@@ -2574,8 +2740,8 @@
         </p:nvSpPr>
         <p:spPr>
           <a:xfrm xmlns:a="http://schemas.openxmlformats.org/drawingml/2006/main">
-            <a:off x="609600" y="552450"/>
-            <a:ext cx="781050" cy="57150"/>
+            <a:off x="609600" y="742950"/>
+            <a:ext cx="9906000" cy="38100"/>
           </a:xfrm>
           <a:prstGeom xmlns:a="http://schemas.openxmlformats.org/drawingml/2006/main" prst="rect">
             <a:avLst/>
@@ -2605,8 +2771,8 @@
         </p:nvSpPr>
         <p:spPr>
           <a:xfrm xmlns:a="http://schemas.openxmlformats.org/drawingml/2006/main">
-            <a:off x="609600" y="762000"/>
-            <a:ext cx="9334500" cy="285750"/>
+            <a:off x="609600" y="342900"/>
+            <a:ext cx="9334500" cy="266700"/>
           </a:xfrm>
           <a:prstGeom xmlns:a="http://schemas.openxmlformats.org/drawingml/2006/main" prst="rect">
             <a:avLst/>
@@ -2618,21 +2784,30 @@
           </a:ln>
         </p:spPr>
         <p:txBody>
-          <a:bodyPr xmlns:a="http://schemas.openxmlformats.org/drawingml/2006/main" lIns="0" tIns="0" rIns="0" bIns="0" anchor="ctr"/>
+          <a:bodyPr xmlns:a="http://schemas.openxmlformats.org/drawingml/2006/main" wrap="square" lIns="0" tIns="0" rIns="0" bIns="0" anchor="ctr">
+            <a:noAutofit/>
+          </a:bodyPr>
           <a:lstStyle xmlns:a="http://schemas.openxmlformats.org/drawingml/2006/main"/>
           <a:p xmlns:a="http://schemas.openxmlformats.org/drawingml/2006/main">
             <a:pPr>
-              <a:defRPr sz="1500" b="1">
+              <a:buNone/>
+              <a:defRPr sz="1425" b="1">
                 <a:solidFill>
                   <a:srgbClr val="28685E"/>
                 </a:solidFill>
+                <a:latin typeface="Arial"/>
+                <a:ea typeface="Arial"/>
+                <a:cs typeface="Arial"/>
               </a:defRPr>
             </a:pPr>
             <a:r>
-              <a:rPr sz="1500" b="1">
+              <a:rPr sz="1425" b="1">
                 <a:solidFill>
                   <a:srgbClr val="28685E"/>
                 </a:solidFill>
+                <a:latin typeface="Arial"/>
+                <a:ea typeface="Arial"/>
+                <a:cs typeface="Arial"/>
               </a:rPr>
               <a:t>MADE BY MATT  /  BUILD SCIENCE</a:t>
             </a:r>
@@ -2641,14 +2816,14 @@
       </p:sp>
       <p:pic>
         <p:nvPicPr>
-          <p:cNvPr id="13" name=""/>
+          <p:cNvPr id="15" name=""/>
           <p:cNvPicPr>
             <a:picLocks xmlns:a="http://schemas.openxmlformats.org/drawingml/2006/main" noChangeAspect="1"/>
           </p:cNvPicPr>
           <p:nvPr/>
         </p:nvPicPr>
         <p:blipFill>
-          <a:blip xmlns:r="http://schemas.openxmlformats.org/officeDocument/2006/relationships" xmlns:a="http://schemas.openxmlformats.org/drawingml/2006/main" r:embed="R0fad50a77c904848"/>
+          <a:blip xmlns:r="http://schemas.openxmlformats.org/officeDocument/2006/relationships" xmlns:a="http://schemas.openxmlformats.org/drawingml/2006/main" r:embed="R376e83997db04403"/>
           <a:stretch xmlns:a="http://schemas.openxmlformats.org/drawingml/2006/main"/>
         </p:blipFill>
         <p:spPr>
@@ -2677,8 +2852,8 @@
         </p:nvSpPr>
         <p:spPr>
           <a:xfrm xmlns:a="http://schemas.openxmlformats.org/drawingml/2006/main">
-            <a:off x="609600" y="1352550"/>
-            <a:ext cx="10972800" cy="952500"/>
+            <a:off x="609600" y="1047750"/>
+            <a:ext cx="10972800" cy="895350"/>
           </a:xfrm>
           <a:prstGeom xmlns:a="http://schemas.openxmlformats.org/drawingml/2006/main" prst="rect">
             <a:avLst/>
@@ -2690,21 +2865,30 @@
           </a:ln>
         </p:spPr>
         <p:txBody>
-          <a:bodyPr xmlns:a="http://schemas.openxmlformats.org/drawingml/2006/main" lIns="0" tIns="0" rIns="0" bIns="0" anchor="ctr"/>
+          <a:bodyPr xmlns:a="http://schemas.openxmlformats.org/drawingml/2006/main" wrap="square" lIns="0" tIns="0" rIns="0" bIns="0" anchor="ctr">
+            <a:noAutofit/>
+          </a:bodyPr>
           <a:lstStyle xmlns:a="http://schemas.openxmlformats.org/drawingml/2006/main"/>
           <a:p xmlns:a="http://schemas.openxmlformats.org/drawingml/2006/main">
             <a:pPr>
-              <a:defRPr sz="3750" b="1">
+              <a:buNone/>
+              <a:defRPr sz="3600" b="1">
                 <a:solidFill>
                   <a:srgbClr val="152B3A"/>
                 </a:solidFill>
+                <a:latin typeface="Arial"/>
+                <a:ea typeface="Arial"/>
+                <a:cs typeface="Arial"/>
               </a:defRPr>
             </a:pPr>
             <a:r>
-              <a:rPr sz="3750" b="1">
+              <a:rPr sz="3600" b="1">
                 <a:solidFill>
                   <a:srgbClr val="152B3A"/>
                 </a:solidFill>
+                <a:latin typeface="Arial"/>
+                <a:ea typeface="Arial"/>
+                <a:cs typeface="Arial"/>
               </a:rPr>
               <a:t>What does the pair do?</a:t>
             </a:r>
@@ -2771,21 +2955,30 @@
           </a:ln>
         </p:spPr>
         <p:txBody>
-          <a:bodyPr xmlns:a="http://schemas.openxmlformats.org/drawingml/2006/main" lIns="0" tIns="0" rIns="0" bIns="0" anchor="ctr"/>
+          <a:bodyPr xmlns:a="http://schemas.openxmlformats.org/drawingml/2006/main" wrap="square" lIns="0" tIns="0" rIns="0" bIns="0" anchor="ctr">
+            <a:noAutofit/>
+          </a:bodyPr>
           <a:lstStyle xmlns:a="http://schemas.openxmlformats.org/drawingml/2006/main"/>
           <a:p xmlns:a="http://schemas.openxmlformats.org/drawingml/2006/main">
             <a:pPr>
-              <a:defRPr sz="1275" b="0">
+              <a:buNone/>
+              <a:defRPr sz="1200" b="0">
                 <a:solidFill>
                   <a:srgbClr val="50616B"/>
                 </a:solidFill>
+                <a:latin typeface="Arial"/>
+                <a:ea typeface="Arial"/>
+                <a:cs typeface="Arial"/>
               </a:defRPr>
             </a:pPr>
             <a:r>
-              <a:rPr sz="1275" b="0">
+              <a:rPr sz="1200" b="0">
                 <a:solidFill>
                   <a:srgbClr val="50616B"/>
                 </a:solidFill>
+                <a:latin typeface="Arial"/>
+                <a:ea typeface="Arial"/>
+                <a:cs typeface="Arial"/>
               </a:rPr>
               <a:t>AUTUMN 1  ·  WEEK 4  ·  LESSON B</a:t>
             </a:r>
@@ -2821,14 +3014,20 @@
           </a:ln>
         </p:spPr>
         <p:txBody>
-          <a:bodyPr xmlns:a="http://schemas.openxmlformats.org/drawingml/2006/main" lIns="0" tIns="0" rIns="0" bIns="0" anchor="ctr"/>
+          <a:bodyPr xmlns:a="http://schemas.openxmlformats.org/drawingml/2006/main" wrap="square" lIns="0" tIns="0" rIns="0" bIns="0" anchor="ctr">
+            <a:noAutofit/>
+          </a:bodyPr>
           <a:lstStyle xmlns:a="http://schemas.openxmlformats.org/drawingml/2006/main"/>
           <a:p xmlns:a="http://schemas.openxmlformats.org/drawingml/2006/main">
             <a:pPr>
+              <a:buNone/>
               <a:defRPr sz="1350" b="1">
                 <a:solidFill>
                   <a:srgbClr val="28685E"/>
                 </a:solidFill>
+                <a:latin typeface="Arial"/>
+                <a:ea typeface="Arial"/>
+                <a:cs typeface="Arial"/>
               </a:defRPr>
             </a:pPr>
             <a:r>
@@ -2836,6 +3035,9 @@
                 <a:solidFill>
                   <a:srgbClr val="28685E"/>
                 </a:solidFill>
+                <a:latin typeface="Arial"/>
+                <a:ea typeface="Arial"/>
+                <a:cs typeface="Arial"/>
               </a:rPr>
               <a:t>10</a:t>
             </a:r>
@@ -2858,8 +3060,8 @@
         </p:nvSpPr>
         <p:spPr>
           <a:xfrm xmlns:a="http://schemas.openxmlformats.org/drawingml/2006/main">
-            <a:off x="609600" y="2619375"/>
-            <a:ext cx="10972800" cy="781050"/>
+            <a:off x="609600" y="2305050"/>
+            <a:ext cx="10972800" cy="914400"/>
           </a:xfrm>
           <a:prstGeom xmlns:a="http://schemas.openxmlformats.org/drawingml/2006/main" prst="rect">
             <a:avLst/>
@@ -2871,14 +3073,20 @@
           </a:ln>
         </p:spPr>
         <p:txBody>
-          <a:bodyPr xmlns:a="http://schemas.openxmlformats.org/drawingml/2006/main" lIns="0" tIns="0" rIns="0" bIns="0" anchor="ctr"/>
+          <a:bodyPr xmlns:a="http://schemas.openxmlformats.org/drawingml/2006/main" wrap="square" lIns="0" tIns="0" rIns="0" bIns="0" anchor="ctr">
+            <a:noAutofit/>
+          </a:bodyPr>
           <a:lstStyle xmlns:a="http://schemas.openxmlformats.org/drawingml/2006/main"/>
           <a:p xmlns:a="http://schemas.openxmlformats.org/drawingml/2006/main">
             <a:pPr>
+              <a:buNone/>
               <a:defRPr sz="2550" b="0">
                 <a:solidFill>
                   <a:srgbClr val="152B3A"/>
                 </a:solidFill>
+                <a:latin typeface="Arial"/>
+                <a:ea typeface="Arial"/>
+                <a:cs typeface="Arial"/>
               </a:defRPr>
             </a:pPr>
             <a:r>
@@ -2886,6 +3094,9 @@
                 <a:solidFill>
                   <a:srgbClr val="152B3A"/>
                 </a:solidFill>
+                <a:latin typeface="Arial"/>
+                <a:ea typeface="Arial"/>
+                <a:cs typeface="Arial"/>
               </a:rPr>
               <a:t>Supported: show which muscle contracts in a bend.</a:t>
             </a:r>
@@ -2908,8 +3119,8 @@
         </p:nvSpPr>
         <p:spPr>
           <a:xfrm xmlns:a="http://schemas.openxmlformats.org/drawingml/2006/main">
-            <a:off x="609600" y="3476625"/>
-            <a:ext cx="10972800" cy="781050"/>
+            <a:off x="609600" y="3352800"/>
+            <a:ext cx="10972800" cy="914400"/>
           </a:xfrm>
           <a:prstGeom xmlns:a="http://schemas.openxmlformats.org/drawingml/2006/main" prst="rect">
             <a:avLst/>
@@ -2921,14 +3132,20 @@
           </a:ln>
         </p:spPr>
         <p:txBody>
-          <a:bodyPr xmlns:a="http://schemas.openxmlformats.org/drawingml/2006/main" lIns="0" tIns="0" rIns="0" bIns="0" anchor="ctr"/>
+          <a:bodyPr xmlns:a="http://schemas.openxmlformats.org/drawingml/2006/main" wrap="square" lIns="0" tIns="0" rIns="0" bIns="0" anchor="ctr">
+            <a:noAutofit/>
+          </a:bodyPr>
           <a:lstStyle xmlns:a="http://schemas.openxmlformats.org/drawingml/2006/main"/>
           <a:p xmlns:a="http://schemas.openxmlformats.org/drawingml/2006/main">
             <a:pPr>
+              <a:buNone/>
               <a:defRPr sz="2550" b="0">
                 <a:solidFill>
                   <a:srgbClr val="152B3A"/>
                 </a:solidFill>
+                <a:latin typeface="Arial"/>
+                <a:ea typeface="Arial"/>
+                <a:cs typeface="Arial"/>
               </a:defRPr>
             </a:pPr>
             <a:r>
@@ -2936,6 +3153,9 @@
                 <a:solidFill>
                   <a:srgbClr val="152B3A"/>
                 </a:solidFill>
+                <a:latin typeface="Arial"/>
+                <a:ea typeface="Arial"/>
+                <a:cs typeface="Arial"/>
               </a:rPr>
               <a:t>Standard: explain the pair during active straighten.</a:t>
             </a:r>
@@ -2958,8 +3178,8 @@
         </p:nvSpPr>
         <p:spPr>
           <a:xfrm xmlns:a="http://schemas.openxmlformats.org/drawingml/2006/main">
-            <a:off x="609600" y="4333875"/>
-            <a:ext cx="10972800" cy="781050"/>
+            <a:off x="609600" y="4400550"/>
+            <a:ext cx="10972800" cy="914400"/>
           </a:xfrm>
           <a:prstGeom xmlns:a="http://schemas.openxmlformats.org/drawingml/2006/main" prst="rect">
             <a:avLst/>
@@ -2971,21 +3191,30 @@
           </a:ln>
         </p:spPr>
         <p:txBody>
-          <a:bodyPr xmlns:a="http://schemas.openxmlformats.org/drawingml/2006/main" lIns="0" tIns="0" rIns="0" bIns="0" anchor="ctr"/>
+          <a:bodyPr xmlns:a="http://schemas.openxmlformats.org/drawingml/2006/main" wrap="square" lIns="0" tIns="0" rIns="0" bIns="0" anchor="ctr">
+            <a:noAutofit/>
+          </a:bodyPr>
           <a:lstStyle xmlns:a="http://schemas.openxmlformats.org/drawingml/2006/main"/>
           <a:p xmlns:a="http://schemas.openxmlformats.org/drawingml/2006/main">
             <a:pPr>
-              <a:defRPr sz="2550" b="0">
-                <a:solidFill>
-                  <a:srgbClr val="152B3A"/>
-                </a:solidFill>
+              <a:buNone/>
+              <a:defRPr sz="2550" b="1">
+                <a:solidFill>
+                  <a:srgbClr val="28685E"/>
+                </a:solidFill>
+                <a:latin typeface="Arial"/>
+                <a:ea typeface="Arial"/>
+                <a:cs typeface="Arial"/>
               </a:defRPr>
             </a:pPr>
             <a:r>
-              <a:rPr sz="2550" b="0">
-                <a:solidFill>
-                  <a:srgbClr val="152B3A"/>
-                </a:solidFill>
+              <a:rPr sz="2550" b="1">
+                <a:solidFill>
+                  <a:srgbClr val="28685E"/>
+                </a:solidFill>
+                <a:latin typeface="Arial"/>
+                <a:ea typeface="Arial"/>
+                <a:cs typeface="Arial"/>
               </a:rPr>
               <a:t>Stretch: explain why one pull cannot push.</a:t>
             </a:r>
@@ -3008,7 +3237,7 @@
     <p:bg>
       <p:bgPr>
         <a:solidFill xmlns:a="http://schemas.openxmlformats.org/drawingml/2006/main">
-          <a:srgbClr val="F5F1E8"/>
+          <a:srgbClr val="FBF9F3"/>
         </a:solidFill>
       </p:bgPr>
     </p:bg>
@@ -3037,8 +3266,8 @@
         </p:nvSpPr>
         <p:spPr>
           <a:xfrm xmlns:a="http://schemas.openxmlformats.org/drawingml/2006/main">
-            <a:off x="609600" y="552450"/>
-            <a:ext cx="781050" cy="57150"/>
+            <a:off x="609600" y="742950"/>
+            <a:ext cx="9906000" cy="38100"/>
           </a:xfrm>
           <a:prstGeom xmlns:a="http://schemas.openxmlformats.org/drawingml/2006/main" prst="rect">
             <a:avLst/>
@@ -3068,8 +3297,8 @@
         </p:nvSpPr>
         <p:spPr>
           <a:xfrm xmlns:a="http://schemas.openxmlformats.org/drawingml/2006/main">
-            <a:off x="609600" y="762000"/>
-            <a:ext cx="9334500" cy="285750"/>
+            <a:off x="609600" y="342900"/>
+            <a:ext cx="9334500" cy="266700"/>
           </a:xfrm>
           <a:prstGeom xmlns:a="http://schemas.openxmlformats.org/drawingml/2006/main" prst="rect">
             <a:avLst/>
@@ -3081,21 +3310,30 @@
           </a:ln>
         </p:spPr>
         <p:txBody>
-          <a:bodyPr xmlns:a="http://schemas.openxmlformats.org/drawingml/2006/main" lIns="0" tIns="0" rIns="0" bIns="0" anchor="ctr"/>
+          <a:bodyPr xmlns:a="http://schemas.openxmlformats.org/drawingml/2006/main" wrap="square" lIns="0" tIns="0" rIns="0" bIns="0" anchor="ctr">
+            <a:noAutofit/>
+          </a:bodyPr>
           <a:lstStyle xmlns:a="http://schemas.openxmlformats.org/drawingml/2006/main"/>
           <a:p xmlns:a="http://schemas.openxmlformats.org/drawingml/2006/main">
             <a:pPr>
-              <a:defRPr sz="1500" b="1">
+              <a:buNone/>
+              <a:defRPr sz="1425" b="1">
                 <a:solidFill>
                   <a:srgbClr val="28685E"/>
                 </a:solidFill>
+                <a:latin typeface="Arial"/>
+                <a:ea typeface="Arial"/>
+                <a:cs typeface="Arial"/>
               </a:defRPr>
             </a:pPr>
             <a:r>
-              <a:rPr sz="1500" b="1">
+              <a:rPr sz="1425" b="1">
                 <a:solidFill>
                   <a:srgbClr val="28685E"/>
                 </a:solidFill>
+                <a:latin typeface="Arial"/>
+                <a:ea typeface="Arial"/>
+                <a:cs typeface="Arial"/>
               </a:rPr>
               <a:t>MADE BY MATT  /  BUILD SCIENCE</a:t>
             </a:r>
@@ -3104,14 +3342,14 @@
       </p:sp>
       <p:pic>
         <p:nvPicPr>
-          <p:cNvPr id="13" name=""/>
+          <p:cNvPr id="15" name=""/>
           <p:cNvPicPr>
             <a:picLocks xmlns:a="http://schemas.openxmlformats.org/drawingml/2006/main" noChangeAspect="1"/>
           </p:cNvPicPr>
           <p:nvPr/>
         </p:nvPicPr>
         <p:blipFill>
-          <a:blip xmlns:r="http://schemas.openxmlformats.org/officeDocument/2006/relationships" xmlns:a="http://schemas.openxmlformats.org/drawingml/2006/main" r:embed="R3ed902d97f554f8d"/>
+          <a:blip xmlns:r="http://schemas.openxmlformats.org/officeDocument/2006/relationships" xmlns:a="http://schemas.openxmlformats.org/drawingml/2006/main" r:embed="Rff1c0314bc654ab7"/>
           <a:stretch xmlns:a="http://schemas.openxmlformats.org/drawingml/2006/main"/>
         </p:blipFill>
         <p:spPr>
@@ -3140,8 +3378,8 @@
         </p:nvSpPr>
         <p:spPr>
           <a:xfrm xmlns:a="http://schemas.openxmlformats.org/drawingml/2006/main">
-            <a:off x="609600" y="1352550"/>
-            <a:ext cx="10972800" cy="952500"/>
+            <a:off x="609600" y="1047750"/>
+            <a:ext cx="10972800" cy="895350"/>
           </a:xfrm>
           <a:prstGeom xmlns:a="http://schemas.openxmlformats.org/drawingml/2006/main" prst="rect">
             <a:avLst/>
@@ -3153,21 +3391,30 @@
           </a:ln>
         </p:spPr>
         <p:txBody>
-          <a:bodyPr xmlns:a="http://schemas.openxmlformats.org/drawingml/2006/main" lIns="0" tIns="0" rIns="0" bIns="0" anchor="ctr"/>
+          <a:bodyPr xmlns:a="http://schemas.openxmlformats.org/drawingml/2006/main" wrap="square" lIns="0" tIns="0" rIns="0" bIns="0" anchor="ctr">
+            <a:noAutofit/>
+          </a:bodyPr>
           <a:lstStyle xmlns:a="http://schemas.openxmlformats.org/drawingml/2006/main"/>
           <a:p xmlns:a="http://schemas.openxmlformats.org/drawingml/2006/main">
             <a:pPr>
-              <a:defRPr sz="3750" b="1">
+              <a:buNone/>
+              <a:defRPr sz="3600" b="1">
                 <a:solidFill>
                   <a:srgbClr val="152B3A"/>
                 </a:solidFill>
+                <a:latin typeface="Arial"/>
+                <a:ea typeface="Arial"/>
+                <a:cs typeface="Arial"/>
               </a:defRPr>
             </a:pPr>
             <a:r>
-              <a:rPr sz="3750" b="1">
+              <a:rPr sz="3600" b="1">
                 <a:solidFill>
                   <a:srgbClr val="152B3A"/>
                 </a:solidFill>
+                <a:latin typeface="Arial"/>
+                <a:ea typeface="Arial"/>
+                <a:cs typeface="Arial"/>
               </a:rPr>
               <a:t>Retrieve the pair and check the join</a:t>
             </a:r>
@@ -3234,21 +3481,30 @@
           </a:ln>
         </p:spPr>
         <p:txBody>
-          <a:bodyPr xmlns:a="http://schemas.openxmlformats.org/drawingml/2006/main" lIns="0" tIns="0" rIns="0" bIns="0" anchor="ctr"/>
+          <a:bodyPr xmlns:a="http://schemas.openxmlformats.org/drawingml/2006/main" wrap="square" lIns="0" tIns="0" rIns="0" bIns="0" anchor="ctr">
+            <a:noAutofit/>
+          </a:bodyPr>
           <a:lstStyle xmlns:a="http://schemas.openxmlformats.org/drawingml/2006/main"/>
           <a:p xmlns:a="http://schemas.openxmlformats.org/drawingml/2006/main">
             <a:pPr>
-              <a:defRPr sz="1275" b="0">
+              <a:buNone/>
+              <a:defRPr sz="1200" b="0">
                 <a:solidFill>
                   <a:srgbClr val="50616B"/>
                 </a:solidFill>
+                <a:latin typeface="Arial"/>
+                <a:ea typeface="Arial"/>
+                <a:cs typeface="Arial"/>
               </a:defRPr>
             </a:pPr>
             <a:r>
-              <a:rPr sz="1275" b="0">
+              <a:rPr sz="1200" b="0">
                 <a:solidFill>
                   <a:srgbClr val="50616B"/>
                 </a:solidFill>
+                <a:latin typeface="Arial"/>
+                <a:ea typeface="Arial"/>
+                <a:cs typeface="Arial"/>
               </a:rPr>
               <a:t>AUTUMN 1  ·  WEEK 4  ·  LESSON B</a:t>
             </a:r>
@@ -3284,14 +3540,20 @@
           </a:ln>
         </p:spPr>
         <p:txBody>
-          <a:bodyPr xmlns:a="http://schemas.openxmlformats.org/drawingml/2006/main" lIns="0" tIns="0" rIns="0" bIns="0" anchor="ctr"/>
+          <a:bodyPr xmlns:a="http://schemas.openxmlformats.org/drawingml/2006/main" wrap="square" lIns="0" tIns="0" rIns="0" bIns="0" anchor="ctr">
+            <a:noAutofit/>
+          </a:bodyPr>
           <a:lstStyle xmlns:a="http://schemas.openxmlformats.org/drawingml/2006/main"/>
           <a:p xmlns:a="http://schemas.openxmlformats.org/drawingml/2006/main">
             <a:pPr>
+              <a:buNone/>
               <a:defRPr sz="1350" b="1">
                 <a:solidFill>
                   <a:srgbClr val="28685E"/>
                 </a:solidFill>
+                <a:latin typeface="Arial"/>
+                <a:ea typeface="Arial"/>
+                <a:cs typeface="Arial"/>
               </a:defRPr>
             </a:pPr>
             <a:r>
@@ -3299,6 +3561,9 @@
                 <a:solidFill>
                   <a:srgbClr val="28685E"/>
                 </a:solidFill>
+                <a:latin typeface="Arial"/>
+                <a:ea typeface="Arial"/>
+                <a:cs typeface="Arial"/>
               </a:rPr>
               <a:t>02</a:t>
             </a:r>
@@ -3321,8 +3586,8 @@
         </p:nvSpPr>
         <p:spPr>
           <a:xfrm xmlns:a="http://schemas.openxmlformats.org/drawingml/2006/main">
-            <a:off x="609600" y="2619375"/>
-            <a:ext cx="10972800" cy="781050"/>
+            <a:off x="609600" y="2305050"/>
+            <a:ext cx="10972800" cy="914400"/>
           </a:xfrm>
           <a:prstGeom xmlns:a="http://schemas.openxmlformats.org/drawingml/2006/main" prst="rect">
             <a:avLst/>
@@ -3334,14 +3599,20 @@
           </a:ln>
         </p:spPr>
         <p:txBody>
-          <a:bodyPr xmlns:a="http://schemas.openxmlformats.org/drawingml/2006/main" lIns="0" tIns="0" rIns="0" bIns="0" anchor="ctr"/>
+          <a:bodyPr xmlns:a="http://schemas.openxmlformats.org/drawingml/2006/main" wrap="square" lIns="0" tIns="0" rIns="0" bIns="0" anchor="ctr">
+            <a:noAutofit/>
+          </a:bodyPr>
           <a:lstStyle xmlns:a="http://schemas.openxmlformats.org/drawingml/2006/main"/>
           <a:p xmlns:a="http://schemas.openxmlformats.org/drawingml/2006/main">
             <a:pPr>
+              <a:buNone/>
               <a:defRPr sz="2550" b="0">
                 <a:solidFill>
                   <a:srgbClr val="152B3A"/>
                 </a:solidFill>
+                <a:latin typeface="Arial"/>
+                <a:ea typeface="Arial"/>
+                <a:cs typeface="Arial"/>
               </a:defRPr>
             </a:pPr>
             <a:r>
@@ -3349,6 +3620,9 @@
                 <a:solidFill>
                   <a:srgbClr val="152B3A"/>
                 </a:solidFill>
+                <a:latin typeface="Arial"/>
+                <a:ea typeface="Arial"/>
+                <a:cs typeface="Arial"/>
               </a:rPr>
               <a:t>Find Monday’s biceps and triceps labels.</a:t>
             </a:r>
@@ -3371,8 +3645,8 @@
         </p:nvSpPr>
         <p:spPr>
           <a:xfrm xmlns:a="http://schemas.openxmlformats.org/drawingml/2006/main">
-            <a:off x="609600" y="3476625"/>
-            <a:ext cx="10972800" cy="781050"/>
+            <a:off x="609600" y="3352800"/>
+            <a:ext cx="10972800" cy="914400"/>
           </a:xfrm>
           <a:prstGeom xmlns:a="http://schemas.openxmlformats.org/drawingml/2006/main" prst="rect">
             <a:avLst/>
@@ -3384,14 +3658,20 @@
           </a:ln>
         </p:spPr>
         <p:txBody>
-          <a:bodyPr xmlns:a="http://schemas.openxmlformats.org/drawingml/2006/main" lIns="0" tIns="0" rIns="0" bIns="0" anchor="ctr"/>
+          <a:bodyPr xmlns:a="http://schemas.openxmlformats.org/drawingml/2006/main" wrap="square" lIns="0" tIns="0" rIns="0" bIns="0" anchor="ctr">
+            <a:noAutofit/>
+          </a:bodyPr>
           <a:lstStyle xmlns:a="http://schemas.openxmlformats.org/drawingml/2006/main"/>
           <a:p xmlns:a="http://schemas.openxmlformats.org/drawingml/2006/main">
             <a:pPr>
+              <a:buNone/>
               <a:defRPr sz="2550" b="0">
                 <a:solidFill>
                   <a:srgbClr val="152B3A"/>
                 </a:solidFill>
+                <a:latin typeface="Arial"/>
+                <a:ea typeface="Arial"/>
+                <a:cs typeface="Arial"/>
               </a:defRPr>
             </a:pPr>
             <a:r>
@@ -3399,6 +3679,9 @@
                 <a:solidFill>
                   <a:srgbClr val="152B3A"/>
                 </a:solidFill>
+                <a:latin typeface="Arial"/>
+                <a:ea typeface="Arial"/>
+                <a:cs typeface="Arial"/>
               </a:rPr>
               <a:t>Check that the prepared elbow can turn.</a:t>
             </a:r>
@@ -3421,8 +3704,8 @@
         </p:nvSpPr>
         <p:spPr>
           <a:xfrm xmlns:a="http://schemas.openxmlformats.org/drawingml/2006/main">
-            <a:off x="609600" y="4333875"/>
-            <a:ext cx="10972800" cy="781050"/>
+            <a:off x="609600" y="4400550"/>
+            <a:ext cx="10972800" cy="914400"/>
           </a:xfrm>
           <a:prstGeom xmlns:a="http://schemas.openxmlformats.org/drawingml/2006/main" prst="rect">
             <a:avLst/>
@@ -3434,21 +3717,30 @@
           </a:ln>
         </p:spPr>
         <p:txBody>
-          <a:bodyPr xmlns:a="http://schemas.openxmlformats.org/drawingml/2006/main" lIns="0" tIns="0" rIns="0" bIns="0" anchor="ctr"/>
+          <a:bodyPr xmlns:a="http://schemas.openxmlformats.org/drawingml/2006/main" wrap="square" lIns="0" tIns="0" rIns="0" bIns="0" anchor="ctr">
+            <a:noAutofit/>
+          </a:bodyPr>
           <a:lstStyle xmlns:a="http://schemas.openxmlformats.org/drawingml/2006/main"/>
           <a:p xmlns:a="http://schemas.openxmlformats.org/drawingml/2006/main">
             <a:pPr>
-              <a:defRPr sz="2550" b="0">
-                <a:solidFill>
-                  <a:srgbClr val="152B3A"/>
-                </a:solidFill>
+              <a:buNone/>
+              <a:defRPr sz="2550" b="1">
+                <a:solidFill>
+                  <a:srgbClr val="28685E"/>
+                </a:solidFill>
+                <a:latin typeface="Arial"/>
+                <a:ea typeface="Arial"/>
+                <a:cs typeface="Arial"/>
               </a:defRPr>
             </a:pPr>
             <a:r>
-              <a:rPr sz="2550" b="0">
-                <a:solidFill>
-                  <a:srgbClr val="152B3A"/>
-                </a:solidFill>
+              <a:rPr sz="2550" b="1">
+                <a:solidFill>
+                  <a:srgbClr val="28685E"/>
+                </a:solidFill>
+                <a:latin typeface="Arial"/>
+                <a:ea typeface="Arial"/>
+                <a:cs typeface="Arial"/>
               </a:rPr>
               <a:t>Choose: build, direct, label or explain.</a:t>
             </a:r>
@@ -3471,7 +3763,7 @@
     <p:bg>
       <p:bgPr>
         <a:solidFill xmlns:a="http://schemas.openxmlformats.org/drawingml/2006/main">
-          <a:srgbClr val="F5F1E8"/>
+          <a:srgbClr val="FBF9F3"/>
         </a:solidFill>
       </p:bgPr>
     </p:bg>
@@ -3500,8 +3792,8 @@
         </p:nvSpPr>
         <p:spPr>
           <a:xfrm xmlns:a="http://schemas.openxmlformats.org/drawingml/2006/main">
-            <a:off x="609600" y="552450"/>
-            <a:ext cx="781050" cy="57150"/>
+            <a:off x="609600" y="742950"/>
+            <a:ext cx="9906000" cy="38100"/>
           </a:xfrm>
           <a:prstGeom xmlns:a="http://schemas.openxmlformats.org/drawingml/2006/main" prst="rect">
             <a:avLst/>
@@ -3531,8 +3823,8 @@
         </p:nvSpPr>
         <p:spPr>
           <a:xfrm xmlns:a="http://schemas.openxmlformats.org/drawingml/2006/main">
-            <a:off x="609600" y="762000"/>
-            <a:ext cx="9334500" cy="285750"/>
+            <a:off x="609600" y="342900"/>
+            <a:ext cx="9334500" cy="266700"/>
           </a:xfrm>
           <a:prstGeom xmlns:a="http://schemas.openxmlformats.org/drawingml/2006/main" prst="rect">
             <a:avLst/>
@@ -3544,21 +3836,30 @@
           </a:ln>
         </p:spPr>
         <p:txBody>
-          <a:bodyPr xmlns:a="http://schemas.openxmlformats.org/drawingml/2006/main" lIns="0" tIns="0" rIns="0" bIns="0" anchor="ctr"/>
+          <a:bodyPr xmlns:a="http://schemas.openxmlformats.org/drawingml/2006/main" wrap="square" lIns="0" tIns="0" rIns="0" bIns="0" anchor="ctr">
+            <a:noAutofit/>
+          </a:bodyPr>
           <a:lstStyle xmlns:a="http://schemas.openxmlformats.org/drawingml/2006/main"/>
           <a:p xmlns:a="http://schemas.openxmlformats.org/drawingml/2006/main">
             <a:pPr>
-              <a:defRPr sz="1500" b="1">
+              <a:buNone/>
+              <a:defRPr sz="1425" b="1">
                 <a:solidFill>
                   <a:srgbClr val="28685E"/>
                 </a:solidFill>
+                <a:latin typeface="Arial"/>
+                <a:ea typeface="Arial"/>
+                <a:cs typeface="Arial"/>
               </a:defRPr>
             </a:pPr>
             <a:r>
-              <a:rPr sz="1500" b="1">
+              <a:rPr sz="1425" b="1">
                 <a:solidFill>
                   <a:srgbClr val="28685E"/>
                 </a:solidFill>
+                <a:latin typeface="Arial"/>
+                <a:ea typeface="Arial"/>
+                <a:cs typeface="Arial"/>
               </a:rPr>
               <a:t>MADE BY MATT  /  BUILD SCIENCE</a:t>
             </a:r>
@@ -3567,14 +3868,14 @@
       </p:sp>
       <p:pic>
         <p:nvPicPr>
-          <p:cNvPr id="14" name=""/>
+          <p:cNvPr id="17" name=""/>
           <p:cNvPicPr>
             <a:picLocks xmlns:a="http://schemas.openxmlformats.org/drawingml/2006/main" noChangeAspect="1"/>
           </p:cNvPicPr>
           <p:nvPr/>
         </p:nvPicPr>
         <p:blipFill>
-          <a:blip xmlns:r="http://schemas.openxmlformats.org/officeDocument/2006/relationships" xmlns:a="http://schemas.openxmlformats.org/drawingml/2006/main" r:embed="Re929ba7a074e4f04"/>
+          <a:blip xmlns:r="http://schemas.openxmlformats.org/officeDocument/2006/relationships" xmlns:a="http://schemas.openxmlformats.org/drawingml/2006/main" r:embed="R420e2d7f28024b8d"/>
           <a:stretch xmlns:a="http://schemas.openxmlformats.org/drawingml/2006/main"/>
         </p:blipFill>
         <p:spPr>
@@ -3603,8 +3904,8 @@
         </p:nvSpPr>
         <p:spPr>
           <a:xfrm xmlns:a="http://schemas.openxmlformats.org/drawingml/2006/main">
-            <a:off x="609600" y="1352550"/>
-            <a:ext cx="10972800" cy="952500"/>
+            <a:off x="609600" y="1047750"/>
+            <a:ext cx="10972800" cy="895350"/>
           </a:xfrm>
           <a:prstGeom xmlns:a="http://schemas.openxmlformats.org/drawingml/2006/main" prst="rect">
             <a:avLst/>
@@ -3616,21 +3917,30 @@
           </a:ln>
         </p:spPr>
         <p:txBody>
-          <a:bodyPr xmlns:a="http://schemas.openxmlformats.org/drawingml/2006/main" lIns="0" tIns="0" rIns="0" bIns="0" anchor="ctr"/>
+          <a:bodyPr xmlns:a="http://schemas.openxmlformats.org/drawingml/2006/main" wrap="square" lIns="0" tIns="0" rIns="0" bIns="0" anchor="ctr">
+            <a:noAutofit/>
+          </a:bodyPr>
           <a:lstStyle xmlns:a="http://schemas.openxmlformats.org/drawingml/2006/main"/>
           <a:p xmlns:a="http://schemas.openxmlformats.org/drawingml/2006/main">
             <a:pPr>
-              <a:defRPr sz="3750" b="1">
+              <a:buNone/>
+              <a:defRPr sz="3600" b="1">
                 <a:solidFill>
                   <a:srgbClr val="152B3A"/>
                 </a:solidFill>
+                <a:latin typeface="Arial"/>
+                <a:ea typeface="Arial"/>
+                <a:cs typeface="Arial"/>
               </a:defRPr>
             </a:pPr>
             <a:r>
-              <a:rPr sz="3750" b="1">
+              <a:rPr sz="3600" b="1">
                 <a:solidFill>
                   <a:srgbClr val="152B3A"/>
                 </a:solidFill>
+                <a:latin typeface="Arial"/>
+                <a:ea typeface="Arial"/>
+                <a:cs typeface="Arial"/>
               </a:rPr>
               <a:t>Build with an adult’s preparation</a:t>
             </a:r>
@@ -3697,21 +4007,30 @@
           </a:ln>
         </p:spPr>
         <p:txBody>
-          <a:bodyPr xmlns:a="http://schemas.openxmlformats.org/drawingml/2006/main" lIns="0" tIns="0" rIns="0" bIns="0" anchor="ctr"/>
+          <a:bodyPr xmlns:a="http://schemas.openxmlformats.org/drawingml/2006/main" wrap="square" lIns="0" tIns="0" rIns="0" bIns="0" anchor="ctr">
+            <a:noAutofit/>
+          </a:bodyPr>
           <a:lstStyle xmlns:a="http://schemas.openxmlformats.org/drawingml/2006/main"/>
           <a:p xmlns:a="http://schemas.openxmlformats.org/drawingml/2006/main">
             <a:pPr>
-              <a:defRPr sz="1275" b="0">
+              <a:buNone/>
+              <a:defRPr sz="1200" b="0">
                 <a:solidFill>
                   <a:srgbClr val="50616B"/>
                 </a:solidFill>
+                <a:latin typeface="Arial"/>
+                <a:ea typeface="Arial"/>
+                <a:cs typeface="Arial"/>
               </a:defRPr>
             </a:pPr>
             <a:r>
-              <a:rPr sz="1275" b="0">
+              <a:rPr sz="1200" b="0">
                 <a:solidFill>
                   <a:srgbClr val="50616B"/>
                 </a:solidFill>
+                <a:latin typeface="Arial"/>
+                <a:ea typeface="Arial"/>
+                <a:cs typeface="Arial"/>
               </a:rPr>
               <a:t>AUTUMN 1  ·  WEEK 4  ·  LESSON B</a:t>
             </a:r>
@@ -3747,14 +4066,20 @@
           </a:ln>
         </p:spPr>
         <p:txBody>
-          <a:bodyPr xmlns:a="http://schemas.openxmlformats.org/drawingml/2006/main" lIns="0" tIns="0" rIns="0" bIns="0" anchor="ctr"/>
+          <a:bodyPr xmlns:a="http://schemas.openxmlformats.org/drawingml/2006/main" wrap="square" lIns="0" tIns="0" rIns="0" bIns="0" anchor="ctr">
+            <a:noAutofit/>
+          </a:bodyPr>
           <a:lstStyle xmlns:a="http://schemas.openxmlformats.org/drawingml/2006/main"/>
           <a:p xmlns:a="http://schemas.openxmlformats.org/drawingml/2006/main">
             <a:pPr>
+              <a:buNone/>
               <a:defRPr sz="1350" b="1">
                 <a:solidFill>
                   <a:srgbClr val="28685E"/>
                 </a:solidFill>
+                <a:latin typeface="Arial"/>
+                <a:ea typeface="Arial"/>
+                <a:cs typeface="Arial"/>
               </a:defRPr>
             </a:pPr>
             <a:r>
@@ -3762,6 +4087,9 @@
                 <a:solidFill>
                   <a:srgbClr val="28685E"/>
                 </a:solidFill>
+                <a:latin typeface="Arial"/>
+                <a:ea typeface="Arial"/>
+                <a:cs typeface="Arial"/>
               </a:rPr>
               <a:t>03</a:t>
             </a:r>
@@ -3784,8 +4112,8 @@
         </p:nvSpPr>
         <p:spPr>
           <a:xfrm xmlns:a="http://schemas.openxmlformats.org/drawingml/2006/main">
-            <a:off x="609600" y="2619375"/>
-            <a:ext cx="10972800" cy="714375"/>
+            <a:off x="609600" y="2305050"/>
+            <a:ext cx="7096125" cy="704850"/>
           </a:xfrm>
           <a:prstGeom xmlns:a="http://schemas.openxmlformats.org/drawingml/2006/main" prst="rect">
             <a:avLst/>
@@ -3797,14 +4125,20 @@
           </a:ln>
         </p:spPr>
         <p:txBody>
-          <a:bodyPr xmlns:a="http://schemas.openxmlformats.org/drawingml/2006/main" lIns="0" tIns="0" rIns="0" bIns="0" anchor="ctr"/>
+          <a:bodyPr xmlns:a="http://schemas.openxmlformats.org/drawingml/2006/main" wrap="square" lIns="0" tIns="0" rIns="0" bIns="0" anchor="ctr">
+            <a:noAutofit/>
+          </a:bodyPr>
           <a:lstStyle xmlns:a="http://schemas.openxmlformats.org/drawingml/2006/main"/>
           <a:p xmlns:a="http://schemas.openxmlformats.org/drawingml/2006/main">
             <a:pPr>
+              <a:buNone/>
               <a:defRPr sz="2550" b="0">
                 <a:solidFill>
                   <a:srgbClr val="152B3A"/>
                 </a:solidFill>
+                <a:latin typeface="Arial"/>
+                <a:ea typeface="Arial"/>
+                <a:cs typeface="Arial"/>
               </a:defRPr>
             </a:pPr>
             <a:r>
@@ -3812,6 +4146,9 @@
                 <a:solidFill>
                   <a:srgbClr val="152B3A"/>
                 </a:solidFill>
+                <a:latin typeface="Arial"/>
+                <a:ea typeface="Arial"/>
+                <a:cs typeface="Arial"/>
               </a:rPr>
               <a:t>Adult prepares and secures the turning join.</a:t>
             </a:r>
@@ -3834,8 +4171,8 @@
         </p:nvSpPr>
         <p:spPr>
           <a:xfrm xmlns:a="http://schemas.openxmlformats.org/drawingml/2006/main">
-            <a:off x="609600" y="3409950"/>
-            <a:ext cx="10972800" cy="714375"/>
+            <a:off x="609600" y="3143250"/>
+            <a:ext cx="7096125" cy="704850"/>
           </a:xfrm>
           <a:prstGeom xmlns:a="http://schemas.openxmlformats.org/drawingml/2006/main" prst="rect">
             <a:avLst/>
@@ -3847,14 +4184,20 @@
           </a:ln>
         </p:spPr>
         <p:txBody>
-          <a:bodyPr xmlns:a="http://schemas.openxmlformats.org/drawingml/2006/main" lIns="0" tIns="0" rIns="0" bIns="0" anchor="ctr"/>
+          <a:bodyPr xmlns:a="http://schemas.openxmlformats.org/drawingml/2006/main" wrap="square" lIns="0" tIns="0" rIns="0" bIns="0" anchor="ctr">
+            <a:noAutofit/>
+          </a:bodyPr>
           <a:lstStyle xmlns:a="http://schemas.openxmlformats.org/drawingml/2006/main"/>
           <a:p xmlns:a="http://schemas.openxmlformats.org/drawingml/2006/main">
             <a:pPr>
+              <a:buNone/>
               <a:defRPr sz="2550" b="0">
                 <a:solidFill>
                   <a:srgbClr val="152B3A"/>
                 </a:solidFill>
+                <a:latin typeface="Arial"/>
+                <a:ea typeface="Arial"/>
+                <a:cs typeface="Arial"/>
               </a:defRPr>
             </a:pPr>
             <a:r>
@@ -3862,6 +4205,9 @@
                 <a:solidFill>
                   <a:srgbClr val="152B3A"/>
                 </a:solidFill>
+                <a:latin typeface="Arial"/>
+                <a:ea typeface="Arial"/>
+                <a:cs typeface="Arial"/>
               </a:rPr>
               <a:t>Put the model flat on the table.</a:t>
             </a:r>
@@ -3884,8 +4230,8 @@
         </p:nvSpPr>
         <p:spPr>
           <a:xfrm xmlns:a="http://schemas.openxmlformats.org/drawingml/2006/main">
-            <a:off x="609600" y="4200525"/>
-            <a:ext cx="10972800" cy="714375"/>
+            <a:off x="609600" y="3981450"/>
+            <a:ext cx="7096125" cy="704850"/>
           </a:xfrm>
           <a:prstGeom xmlns:a="http://schemas.openxmlformats.org/drawingml/2006/main" prst="rect">
             <a:avLst/>
@@ -3897,14 +4243,20 @@
           </a:ln>
         </p:spPr>
         <p:txBody>
-          <a:bodyPr xmlns:a="http://schemas.openxmlformats.org/drawingml/2006/main" lIns="0" tIns="0" rIns="0" bIns="0" anchor="ctr"/>
+          <a:bodyPr xmlns:a="http://schemas.openxmlformats.org/drawingml/2006/main" wrap="square" lIns="0" tIns="0" rIns="0" bIns="0" anchor="ctr">
+            <a:noAutofit/>
+          </a:bodyPr>
           <a:lstStyle xmlns:a="http://schemas.openxmlformats.org/drawingml/2006/main"/>
           <a:p xmlns:a="http://schemas.openxmlformats.org/drawingml/2006/main">
             <a:pPr>
+              <a:buNone/>
               <a:defRPr sz="2550" b="0">
                 <a:solidFill>
                   <a:srgbClr val="152B3A"/>
                 </a:solidFill>
+                <a:latin typeface="Arial"/>
+                <a:ea typeface="Arial"/>
+                <a:cs typeface="Arial"/>
               </a:defRPr>
             </a:pPr>
             <a:r>
@@ -3912,6 +4264,9 @@
                 <a:solidFill>
                   <a:srgbClr val="152B3A"/>
                 </a:solidFill>
+                <a:latin typeface="Arial"/>
+                <a:ea typeface="Arial"/>
+                <a:cs typeface="Arial"/>
               </a:rPr>
               <a:t>Attach the loose pull strings to the tabs.</a:t>
             </a:r>
@@ -3934,8 +4289,8 @@
         </p:nvSpPr>
         <p:spPr>
           <a:xfrm xmlns:a="http://schemas.openxmlformats.org/drawingml/2006/main">
-            <a:off x="609600" y="4991100"/>
-            <a:ext cx="10972800" cy="714375"/>
+            <a:off x="609600" y="4819650"/>
+            <a:ext cx="7096125" cy="704850"/>
           </a:xfrm>
           <a:prstGeom xmlns:a="http://schemas.openxmlformats.org/drawingml/2006/main" prst="rect">
             <a:avLst/>
@@ -3947,27 +4302,58 @@
           </a:ln>
         </p:spPr>
         <p:txBody>
-          <a:bodyPr xmlns:a="http://schemas.openxmlformats.org/drawingml/2006/main" lIns="0" tIns="0" rIns="0" bIns="0" anchor="ctr"/>
+          <a:bodyPr xmlns:a="http://schemas.openxmlformats.org/drawingml/2006/main" wrap="square" lIns="0" tIns="0" rIns="0" bIns="0" anchor="ctr">
+            <a:noAutofit/>
+          </a:bodyPr>
           <a:lstStyle xmlns:a="http://schemas.openxmlformats.org/drawingml/2006/main"/>
           <a:p xmlns:a="http://schemas.openxmlformats.org/drawingml/2006/main">
             <a:pPr>
-              <a:defRPr sz="2550" b="0">
-                <a:solidFill>
-                  <a:srgbClr val="152B3A"/>
-                </a:solidFill>
+              <a:buNone/>
+              <a:defRPr sz="2550" b="1">
+                <a:solidFill>
+                  <a:srgbClr val="28685E"/>
+                </a:solidFill>
+                <a:latin typeface="Arial"/>
+                <a:ea typeface="Arial"/>
+                <a:cs typeface="Arial"/>
               </a:defRPr>
             </a:pPr>
             <a:r>
-              <a:rPr sz="2550" b="0">
-                <a:solidFill>
-                  <a:srgbClr val="152B3A"/>
-                </a:solidFill>
+              <a:rPr sz="2550" b="1">
+                <a:solidFill>
+                  <a:srgbClr val="28685E"/>
+                </a:solidFill>
+                <a:latin typeface="Arial"/>
+                <a:ea typeface="Arial"/>
+                <a:cs typeface="Arial"/>
               </a:rPr>
               <a:t>Keep each free end clear and untangled.</a:t>
             </a:r>
           </a:p>
         </p:txBody>
       </p:sp>
+      <p:pic>
+        <p:nvPicPr>
+          <p:cNvPr id="26" name=""/>
+          <p:cNvPicPr>
+            <a:picLocks xmlns:a="http://schemas.openxmlformats.org/drawingml/2006/main" noChangeAspect="1"/>
+          </p:cNvPicPr>
+          <p:nvPr/>
+        </p:nvPicPr>
+        <p:blipFill>
+          <a:blip xmlns:r="http://schemas.openxmlformats.org/officeDocument/2006/relationships" xmlns:a="http://schemas.openxmlformats.org/drawingml/2006/main" r:embed="R9d200790fb734d32"/>
+          <a:stretch xmlns:a="http://schemas.openxmlformats.org/drawingml/2006/main"/>
+        </p:blipFill>
+        <p:spPr>
+          <a:xfrm xmlns:a="http://schemas.openxmlformats.org/drawingml/2006/main">
+            <a:off x="8429625" y="2971800"/>
+            <a:ext cx="2857500" cy="2143125"/>
+          </a:xfrm>
+          <a:prstGeom xmlns:a="http://schemas.openxmlformats.org/drawingml/2006/main" prst="rect">
+            <a:avLst/>
+          </a:prstGeom>
+        </p:spPr>
+      </p:pic>
     </p:spTree>
     <p:extLst>
       <p:ext uri="{BB962C8B-B14F-4D97-AF65-F5344CB8AC3E}">
@@ -3984,7 +4370,7 @@
     <p:bg>
       <p:bgPr>
         <a:solidFill xmlns:a="http://schemas.openxmlformats.org/drawingml/2006/main">
-          <a:srgbClr val="F5F1E8"/>
+          <a:srgbClr val="FBF9F3"/>
         </a:solidFill>
       </p:bgPr>
     </p:bg>
@@ -4013,8 +4399,8 @@
         </p:nvSpPr>
         <p:spPr>
           <a:xfrm xmlns:a="http://schemas.openxmlformats.org/drawingml/2006/main">
-            <a:off x="609600" y="552450"/>
-            <a:ext cx="781050" cy="57150"/>
+            <a:off x="609600" y="742950"/>
+            <a:ext cx="9906000" cy="38100"/>
           </a:xfrm>
           <a:prstGeom xmlns:a="http://schemas.openxmlformats.org/drawingml/2006/main" prst="rect">
             <a:avLst/>
@@ -4044,8 +4430,8 @@
         </p:nvSpPr>
         <p:spPr>
           <a:xfrm xmlns:a="http://schemas.openxmlformats.org/drawingml/2006/main">
-            <a:off x="609600" y="762000"/>
-            <a:ext cx="9334500" cy="285750"/>
+            <a:off x="609600" y="342900"/>
+            <a:ext cx="9334500" cy="266700"/>
           </a:xfrm>
           <a:prstGeom xmlns:a="http://schemas.openxmlformats.org/drawingml/2006/main" prst="rect">
             <a:avLst/>
@@ -4057,21 +4443,30 @@
           </a:ln>
         </p:spPr>
         <p:txBody>
-          <a:bodyPr xmlns:a="http://schemas.openxmlformats.org/drawingml/2006/main" lIns="0" tIns="0" rIns="0" bIns="0" anchor="ctr"/>
+          <a:bodyPr xmlns:a="http://schemas.openxmlformats.org/drawingml/2006/main" wrap="square" lIns="0" tIns="0" rIns="0" bIns="0" anchor="ctr">
+            <a:noAutofit/>
+          </a:bodyPr>
           <a:lstStyle xmlns:a="http://schemas.openxmlformats.org/drawingml/2006/main"/>
           <a:p xmlns:a="http://schemas.openxmlformats.org/drawingml/2006/main">
             <a:pPr>
-              <a:defRPr sz="1500" b="1">
+              <a:buNone/>
+              <a:defRPr sz="1425" b="1">
                 <a:solidFill>
                   <a:srgbClr val="28685E"/>
                 </a:solidFill>
+                <a:latin typeface="Arial"/>
+                <a:ea typeface="Arial"/>
+                <a:cs typeface="Arial"/>
               </a:defRPr>
             </a:pPr>
             <a:r>
-              <a:rPr sz="1500" b="1">
+              <a:rPr sz="1425" b="1">
                 <a:solidFill>
                   <a:srgbClr val="28685E"/>
                 </a:solidFill>
+                <a:latin typeface="Arial"/>
+                <a:ea typeface="Arial"/>
+                <a:cs typeface="Arial"/>
               </a:rPr>
               <a:t>MADE BY MATT  /  BUILD SCIENCE</a:t>
             </a:r>
@@ -4080,14 +4475,14 @@
       </p:sp>
       <p:pic>
         <p:nvPicPr>
-          <p:cNvPr id="14" name=""/>
+          <p:cNvPr id="16" name=""/>
           <p:cNvPicPr>
             <a:picLocks xmlns:a="http://schemas.openxmlformats.org/drawingml/2006/main" noChangeAspect="1"/>
           </p:cNvPicPr>
           <p:nvPr/>
         </p:nvPicPr>
         <p:blipFill>
-          <a:blip xmlns:r="http://schemas.openxmlformats.org/officeDocument/2006/relationships" xmlns:a="http://schemas.openxmlformats.org/drawingml/2006/main" r:embed="R8730699f1b974205"/>
+          <a:blip xmlns:r="http://schemas.openxmlformats.org/officeDocument/2006/relationships" xmlns:a="http://schemas.openxmlformats.org/drawingml/2006/main" r:embed="R6b9e99cee8124bfa"/>
           <a:stretch xmlns:a="http://schemas.openxmlformats.org/drawingml/2006/main"/>
         </p:blipFill>
         <p:spPr>
@@ -4116,8 +4511,8 @@
         </p:nvSpPr>
         <p:spPr>
           <a:xfrm xmlns:a="http://schemas.openxmlformats.org/drawingml/2006/main">
-            <a:off x="609600" y="1352550"/>
-            <a:ext cx="10972800" cy="952500"/>
+            <a:off x="609600" y="1047750"/>
+            <a:ext cx="10972800" cy="895350"/>
           </a:xfrm>
           <a:prstGeom xmlns:a="http://schemas.openxmlformats.org/drawingml/2006/main" prst="rect">
             <a:avLst/>
@@ -4129,21 +4524,30 @@
           </a:ln>
         </p:spPr>
         <p:txBody>
-          <a:bodyPr xmlns:a="http://schemas.openxmlformats.org/drawingml/2006/main" lIns="0" tIns="0" rIns="0" bIns="0" anchor="ctr"/>
+          <a:bodyPr xmlns:a="http://schemas.openxmlformats.org/drawingml/2006/main" wrap="square" lIns="0" tIns="0" rIns="0" bIns="0" anchor="ctr">
+            <a:noAutofit/>
+          </a:bodyPr>
           <a:lstStyle xmlns:a="http://schemas.openxmlformats.org/drawingml/2006/main"/>
           <a:p xmlns:a="http://schemas.openxmlformats.org/drawingml/2006/main">
             <a:pPr>
-              <a:defRPr sz="3750" b="1">
+              <a:buNone/>
+              <a:defRPr sz="3600" b="1">
                 <a:solidFill>
                   <a:srgbClr val="152B3A"/>
                 </a:solidFill>
+                <a:latin typeface="Arial"/>
+                <a:ea typeface="Arial"/>
+                <a:cs typeface="Arial"/>
               </a:defRPr>
             </a:pPr>
             <a:r>
-              <a:rPr sz="3750" b="1">
+              <a:rPr sz="3600" b="1">
                 <a:solidFill>
                   <a:srgbClr val="152B3A"/>
                 </a:solidFill>
+                <a:latin typeface="Arial"/>
+                <a:ea typeface="Arial"/>
+                <a:cs typeface="Arial"/>
               </a:rPr>
               <a:t>Make one careful bend</a:t>
             </a:r>
@@ -4210,21 +4614,30 @@
           </a:ln>
         </p:spPr>
         <p:txBody>
-          <a:bodyPr xmlns:a="http://schemas.openxmlformats.org/drawingml/2006/main" lIns="0" tIns="0" rIns="0" bIns="0" anchor="ctr"/>
+          <a:bodyPr xmlns:a="http://schemas.openxmlformats.org/drawingml/2006/main" wrap="square" lIns="0" tIns="0" rIns="0" bIns="0" anchor="ctr">
+            <a:noAutofit/>
+          </a:bodyPr>
           <a:lstStyle xmlns:a="http://schemas.openxmlformats.org/drawingml/2006/main"/>
           <a:p xmlns:a="http://schemas.openxmlformats.org/drawingml/2006/main">
             <a:pPr>
-              <a:defRPr sz="1275" b="0">
+              <a:buNone/>
+              <a:defRPr sz="1200" b="0">
                 <a:solidFill>
                   <a:srgbClr val="50616B"/>
                 </a:solidFill>
+                <a:latin typeface="Arial"/>
+                <a:ea typeface="Arial"/>
+                <a:cs typeface="Arial"/>
               </a:defRPr>
             </a:pPr>
             <a:r>
-              <a:rPr sz="1275" b="0">
+              <a:rPr sz="1200" b="0">
                 <a:solidFill>
                   <a:srgbClr val="50616B"/>
                 </a:solidFill>
+                <a:latin typeface="Arial"/>
+                <a:ea typeface="Arial"/>
+                <a:cs typeface="Arial"/>
               </a:rPr>
               <a:t>AUTUMN 1  ·  WEEK 4  ·  LESSON B</a:t>
             </a:r>
@@ -4260,14 +4673,20 @@
           </a:ln>
         </p:spPr>
         <p:txBody>
-          <a:bodyPr xmlns:a="http://schemas.openxmlformats.org/drawingml/2006/main" lIns="0" tIns="0" rIns="0" bIns="0" anchor="ctr"/>
+          <a:bodyPr xmlns:a="http://schemas.openxmlformats.org/drawingml/2006/main" wrap="square" lIns="0" tIns="0" rIns="0" bIns="0" anchor="ctr">
+            <a:noAutofit/>
+          </a:bodyPr>
           <a:lstStyle xmlns:a="http://schemas.openxmlformats.org/drawingml/2006/main"/>
           <a:p xmlns:a="http://schemas.openxmlformats.org/drawingml/2006/main">
             <a:pPr>
+              <a:buNone/>
               <a:defRPr sz="1350" b="1">
                 <a:solidFill>
                   <a:srgbClr val="28685E"/>
                 </a:solidFill>
+                <a:latin typeface="Arial"/>
+                <a:ea typeface="Arial"/>
+                <a:cs typeface="Arial"/>
               </a:defRPr>
             </a:pPr>
             <a:r>
@@ -4275,6 +4694,9 @@
                 <a:solidFill>
                   <a:srgbClr val="28685E"/>
                 </a:solidFill>
+                <a:latin typeface="Arial"/>
+                <a:ea typeface="Arial"/>
+                <a:cs typeface="Arial"/>
               </a:rPr>
               <a:t>04</a:t>
             </a:r>
@@ -4297,8 +4719,8 @@
         </p:nvSpPr>
         <p:spPr>
           <a:xfrm xmlns:a="http://schemas.openxmlformats.org/drawingml/2006/main">
-            <a:off x="609600" y="2619375"/>
-            <a:ext cx="10972800" cy="714375"/>
+            <a:off x="609600" y="2305050"/>
+            <a:ext cx="10972800" cy="704850"/>
           </a:xfrm>
           <a:prstGeom xmlns:a="http://schemas.openxmlformats.org/drawingml/2006/main" prst="rect">
             <a:avLst/>
@@ -4310,14 +4732,20 @@
           </a:ln>
         </p:spPr>
         <p:txBody>
-          <a:bodyPr xmlns:a="http://schemas.openxmlformats.org/drawingml/2006/main" lIns="0" tIns="0" rIns="0" bIns="0" anchor="ctr"/>
+          <a:bodyPr xmlns:a="http://schemas.openxmlformats.org/drawingml/2006/main" wrap="square" lIns="0" tIns="0" rIns="0" bIns="0" anchor="ctr">
+            <a:noAutofit/>
+          </a:bodyPr>
           <a:lstStyle xmlns:a="http://schemas.openxmlformats.org/drawingml/2006/main"/>
           <a:p xmlns:a="http://schemas.openxmlformats.org/drawingml/2006/main">
             <a:pPr>
+              <a:buNone/>
               <a:defRPr sz="2550" b="0">
                 <a:solidFill>
                   <a:srgbClr val="152B3A"/>
                 </a:solidFill>
+                <a:latin typeface="Arial"/>
+                <a:ea typeface="Arial"/>
+                <a:cs typeface="Arial"/>
               </a:defRPr>
             </a:pPr>
             <a:r>
@@ -4325,6 +4753,9 @@
                 <a:solidFill>
                   <a:srgbClr val="152B3A"/>
                 </a:solidFill>
+                <a:latin typeface="Arial"/>
+                <a:ea typeface="Arial"/>
+                <a:cs typeface="Arial"/>
               </a:rPr>
               <a:t>Hold the upper card steady.</a:t>
             </a:r>
@@ -4347,8 +4778,8 @@
         </p:nvSpPr>
         <p:spPr>
           <a:xfrm xmlns:a="http://schemas.openxmlformats.org/drawingml/2006/main">
-            <a:off x="609600" y="3409950"/>
-            <a:ext cx="10972800" cy="714375"/>
+            <a:off x="609600" y="3143250"/>
+            <a:ext cx="10972800" cy="704850"/>
           </a:xfrm>
           <a:prstGeom xmlns:a="http://schemas.openxmlformats.org/drawingml/2006/main" prst="rect">
             <a:avLst/>
@@ -4360,14 +4791,20 @@
           </a:ln>
         </p:spPr>
         <p:txBody>
-          <a:bodyPr xmlns:a="http://schemas.openxmlformats.org/drawingml/2006/main" lIns="0" tIns="0" rIns="0" bIns="0" anchor="ctr"/>
+          <a:bodyPr xmlns:a="http://schemas.openxmlformats.org/drawingml/2006/main" wrap="square" lIns="0" tIns="0" rIns="0" bIns="0" anchor="ctr">
+            <a:noAutofit/>
+          </a:bodyPr>
           <a:lstStyle xmlns:a="http://schemas.openxmlformats.org/drawingml/2006/main"/>
           <a:p xmlns:a="http://schemas.openxmlformats.org/drawingml/2006/main">
             <a:pPr>
+              <a:buNone/>
               <a:defRPr sz="2550" b="0">
                 <a:solidFill>
                   <a:srgbClr val="152B3A"/>
                 </a:solidFill>
+                <a:latin typeface="Arial"/>
+                <a:ea typeface="Arial"/>
+                <a:cs typeface="Arial"/>
               </a:defRPr>
             </a:pPr>
             <a:r>
@@ -4375,6 +4812,9 @@
                 <a:solidFill>
                   <a:srgbClr val="152B3A"/>
                 </a:solidFill>
+                <a:latin typeface="Arial"/>
+                <a:ea typeface="Arial"/>
+                <a:cs typeface="Arial"/>
               </a:rPr>
               <a:t>Gently pull the bending string.</a:t>
             </a:r>
@@ -4397,8 +4837,8 @@
         </p:nvSpPr>
         <p:spPr>
           <a:xfrm xmlns:a="http://schemas.openxmlformats.org/drawingml/2006/main">
-            <a:off x="609600" y="4200525"/>
-            <a:ext cx="10972800" cy="714375"/>
+            <a:off x="609600" y="3981450"/>
+            <a:ext cx="10972800" cy="704850"/>
           </a:xfrm>
           <a:prstGeom xmlns:a="http://schemas.openxmlformats.org/drawingml/2006/main" prst="rect">
             <a:avLst/>
@@ -4410,14 +4850,20 @@
           </a:ln>
         </p:spPr>
         <p:txBody>
-          <a:bodyPr xmlns:a="http://schemas.openxmlformats.org/drawingml/2006/main" lIns="0" tIns="0" rIns="0" bIns="0" anchor="ctr"/>
+          <a:bodyPr xmlns:a="http://schemas.openxmlformats.org/drawingml/2006/main" wrap="square" lIns="0" tIns="0" rIns="0" bIns="0" anchor="ctr">
+            <a:noAutofit/>
+          </a:bodyPr>
           <a:lstStyle xmlns:a="http://schemas.openxmlformats.org/drawingml/2006/main"/>
           <a:p xmlns:a="http://schemas.openxmlformats.org/drawingml/2006/main">
             <a:pPr>
+              <a:buNone/>
               <a:defRPr sz="2550" b="0">
                 <a:solidFill>
                   <a:srgbClr val="152B3A"/>
                 </a:solidFill>
+                <a:latin typeface="Arial"/>
+                <a:ea typeface="Arial"/>
+                <a:cs typeface="Arial"/>
               </a:defRPr>
             </a:pPr>
             <a:r>
@@ -4425,6 +4871,9 @@
                 <a:solidFill>
                   <a:srgbClr val="152B3A"/>
                 </a:solidFill>
+                <a:latin typeface="Arial"/>
+                <a:ea typeface="Arial"/>
+                <a:cs typeface="Arial"/>
               </a:rPr>
               <a:t>Place BICEPS — CONTRACTS.</a:t>
             </a:r>
@@ -4447,8 +4896,8 @@
         </p:nvSpPr>
         <p:spPr>
           <a:xfrm xmlns:a="http://schemas.openxmlformats.org/drawingml/2006/main">
-            <a:off x="609600" y="4991100"/>
-            <a:ext cx="10972800" cy="714375"/>
+            <a:off x="609600" y="4819650"/>
+            <a:ext cx="10972800" cy="704850"/>
           </a:xfrm>
           <a:prstGeom xmlns:a="http://schemas.openxmlformats.org/drawingml/2006/main" prst="rect">
             <a:avLst/>
@@ -4460,21 +4909,30 @@
           </a:ln>
         </p:spPr>
         <p:txBody>
-          <a:bodyPr xmlns:a="http://schemas.openxmlformats.org/drawingml/2006/main" lIns="0" tIns="0" rIns="0" bIns="0" anchor="ctr"/>
+          <a:bodyPr xmlns:a="http://schemas.openxmlformats.org/drawingml/2006/main" wrap="square" lIns="0" tIns="0" rIns="0" bIns="0" anchor="ctr">
+            <a:noAutofit/>
+          </a:bodyPr>
           <a:lstStyle xmlns:a="http://schemas.openxmlformats.org/drawingml/2006/main"/>
           <a:p xmlns:a="http://schemas.openxmlformats.org/drawingml/2006/main">
             <a:pPr>
-              <a:defRPr sz="2550" b="0">
-                <a:solidFill>
-                  <a:srgbClr val="152B3A"/>
-                </a:solidFill>
+              <a:buNone/>
+              <a:defRPr sz="2550" b="1">
+                <a:solidFill>
+                  <a:srgbClr val="28685E"/>
+                </a:solidFill>
+                <a:latin typeface="Arial"/>
+                <a:ea typeface="Arial"/>
+                <a:cs typeface="Arial"/>
               </a:defRPr>
             </a:pPr>
             <a:r>
-              <a:rPr sz="2550" b="0">
-                <a:solidFill>
-                  <a:srgbClr val="152B3A"/>
-                </a:solidFill>
+              <a:rPr sz="2550" b="1">
+                <a:solidFill>
+                  <a:srgbClr val="28685E"/>
+                </a:solidFill>
+                <a:latin typeface="Arial"/>
+                <a:ea typeface="Arial"/>
+                <a:cs typeface="Arial"/>
               </a:rPr>
               <a:t>Place TRICEPS — RELAXES.</a:t>
             </a:r>
@@ -4497,7 +4955,7 @@
     <p:bg>
       <p:bgPr>
         <a:solidFill xmlns:a="http://schemas.openxmlformats.org/drawingml/2006/main">
-          <a:srgbClr val="F5F1E8"/>
+          <a:srgbClr val="FBF9F3"/>
         </a:solidFill>
       </p:bgPr>
     </p:bg>
@@ -4526,8 +4984,8 @@
         </p:nvSpPr>
         <p:spPr>
           <a:xfrm xmlns:a="http://schemas.openxmlformats.org/drawingml/2006/main">
-            <a:off x="609600" y="552450"/>
-            <a:ext cx="781050" cy="57150"/>
+            <a:off x="609600" y="742950"/>
+            <a:ext cx="9906000" cy="38100"/>
           </a:xfrm>
           <a:prstGeom xmlns:a="http://schemas.openxmlformats.org/drawingml/2006/main" prst="rect">
             <a:avLst/>
@@ -4557,8 +5015,8 @@
         </p:nvSpPr>
         <p:spPr>
           <a:xfrm xmlns:a="http://schemas.openxmlformats.org/drawingml/2006/main">
-            <a:off x="609600" y="762000"/>
-            <a:ext cx="9334500" cy="285750"/>
+            <a:off x="609600" y="342900"/>
+            <a:ext cx="9334500" cy="266700"/>
           </a:xfrm>
           <a:prstGeom xmlns:a="http://schemas.openxmlformats.org/drawingml/2006/main" prst="rect">
             <a:avLst/>
@@ -4570,21 +5028,30 @@
           </a:ln>
         </p:spPr>
         <p:txBody>
-          <a:bodyPr xmlns:a="http://schemas.openxmlformats.org/drawingml/2006/main" lIns="0" tIns="0" rIns="0" bIns="0" anchor="ctr"/>
+          <a:bodyPr xmlns:a="http://schemas.openxmlformats.org/drawingml/2006/main" wrap="square" lIns="0" tIns="0" rIns="0" bIns="0" anchor="ctr">
+            <a:noAutofit/>
+          </a:bodyPr>
           <a:lstStyle xmlns:a="http://schemas.openxmlformats.org/drawingml/2006/main"/>
           <a:p xmlns:a="http://schemas.openxmlformats.org/drawingml/2006/main">
             <a:pPr>
-              <a:defRPr sz="1500" b="1">
+              <a:buNone/>
+              <a:defRPr sz="1425" b="1">
                 <a:solidFill>
                   <a:srgbClr val="28685E"/>
                 </a:solidFill>
+                <a:latin typeface="Arial"/>
+                <a:ea typeface="Arial"/>
+                <a:cs typeface="Arial"/>
               </a:defRPr>
             </a:pPr>
             <a:r>
-              <a:rPr sz="1500" b="1">
+              <a:rPr sz="1425" b="1">
                 <a:solidFill>
                   <a:srgbClr val="28685E"/>
                 </a:solidFill>
+                <a:latin typeface="Arial"/>
+                <a:ea typeface="Arial"/>
+                <a:cs typeface="Arial"/>
               </a:rPr>
               <a:t>MADE BY MATT  /  BUILD SCIENCE</a:t>
             </a:r>
@@ -4593,14 +5060,14 @@
       </p:sp>
       <p:pic>
         <p:nvPicPr>
-          <p:cNvPr id="14" name=""/>
+          <p:cNvPr id="16" name=""/>
           <p:cNvPicPr>
             <a:picLocks xmlns:a="http://schemas.openxmlformats.org/drawingml/2006/main" noChangeAspect="1"/>
           </p:cNvPicPr>
           <p:nvPr/>
         </p:nvPicPr>
         <p:blipFill>
-          <a:blip xmlns:r="http://schemas.openxmlformats.org/officeDocument/2006/relationships" xmlns:a="http://schemas.openxmlformats.org/drawingml/2006/main" r:embed="R81052d5718994f45"/>
+          <a:blip xmlns:r="http://schemas.openxmlformats.org/officeDocument/2006/relationships" xmlns:a="http://schemas.openxmlformats.org/drawingml/2006/main" r:embed="R6e862a725f114b83"/>
           <a:stretch xmlns:a="http://schemas.openxmlformats.org/drawingml/2006/main"/>
         </p:blipFill>
         <p:spPr>
@@ -4629,8 +5096,8 @@
         </p:nvSpPr>
         <p:spPr>
           <a:xfrm xmlns:a="http://schemas.openxmlformats.org/drawingml/2006/main">
-            <a:off x="609600" y="1352550"/>
-            <a:ext cx="10972800" cy="952500"/>
+            <a:off x="609600" y="1047750"/>
+            <a:ext cx="10972800" cy="895350"/>
           </a:xfrm>
           <a:prstGeom xmlns:a="http://schemas.openxmlformats.org/drawingml/2006/main" prst="rect">
             <a:avLst/>
@@ -4642,21 +5109,30 @@
           </a:ln>
         </p:spPr>
         <p:txBody>
-          <a:bodyPr xmlns:a="http://schemas.openxmlformats.org/drawingml/2006/main" lIns="0" tIns="0" rIns="0" bIns="0" anchor="ctr"/>
+          <a:bodyPr xmlns:a="http://schemas.openxmlformats.org/drawingml/2006/main" wrap="square" lIns="0" tIns="0" rIns="0" bIns="0" anchor="ctr">
+            <a:noAutofit/>
+          </a:bodyPr>
           <a:lstStyle xmlns:a="http://schemas.openxmlformats.org/drawingml/2006/main"/>
           <a:p xmlns:a="http://schemas.openxmlformats.org/drawingml/2006/main">
             <a:pPr>
-              <a:defRPr sz="3750" b="1">
+              <a:buNone/>
+              <a:defRPr sz="3600" b="1">
                 <a:solidFill>
                   <a:srgbClr val="152B3A"/>
                 </a:solidFill>
+                <a:latin typeface="Arial"/>
+                <a:ea typeface="Arial"/>
+                <a:cs typeface="Arial"/>
               </a:defRPr>
             </a:pPr>
             <a:r>
-              <a:rPr sz="3750" b="1">
+              <a:rPr sz="3600" b="1">
                 <a:solidFill>
                   <a:srgbClr val="152B3A"/>
                 </a:solidFill>
+                <a:latin typeface="Arial"/>
+                <a:ea typeface="Arial"/>
+                <a:cs typeface="Arial"/>
               </a:rPr>
               <a:t>Actively straighten and swap roles</a:t>
             </a:r>
@@ -4723,21 +5199,30 @@
           </a:ln>
         </p:spPr>
         <p:txBody>
-          <a:bodyPr xmlns:a="http://schemas.openxmlformats.org/drawingml/2006/main" lIns="0" tIns="0" rIns="0" bIns="0" anchor="ctr"/>
+          <a:bodyPr xmlns:a="http://schemas.openxmlformats.org/drawingml/2006/main" wrap="square" lIns="0" tIns="0" rIns="0" bIns="0" anchor="ctr">
+            <a:noAutofit/>
+          </a:bodyPr>
           <a:lstStyle xmlns:a="http://schemas.openxmlformats.org/drawingml/2006/main"/>
           <a:p xmlns:a="http://schemas.openxmlformats.org/drawingml/2006/main">
             <a:pPr>
-              <a:defRPr sz="1275" b="0">
+              <a:buNone/>
+              <a:defRPr sz="1200" b="0">
                 <a:solidFill>
                   <a:srgbClr val="50616B"/>
                 </a:solidFill>
+                <a:latin typeface="Arial"/>
+                <a:ea typeface="Arial"/>
+                <a:cs typeface="Arial"/>
               </a:defRPr>
             </a:pPr>
             <a:r>
-              <a:rPr sz="1275" b="0">
+              <a:rPr sz="1200" b="0">
                 <a:solidFill>
                   <a:srgbClr val="50616B"/>
                 </a:solidFill>
+                <a:latin typeface="Arial"/>
+                <a:ea typeface="Arial"/>
+                <a:cs typeface="Arial"/>
               </a:rPr>
               <a:t>AUTUMN 1  ·  WEEK 4  ·  LESSON B</a:t>
             </a:r>
@@ -4773,14 +5258,20 @@
           </a:ln>
         </p:spPr>
         <p:txBody>
-          <a:bodyPr xmlns:a="http://schemas.openxmlformats.org/drawingml/2006/main" lIns="0" tIns="0" rIns="0" bIns="0" anchor="ctr"/>
+          <a:bodyPr xmlns:a="http://schemas.openxmlformats.org/drawingml/2006/main" wrap="square" lIns="0" tIns="0" rIns="0" bIns="0" anchor="ctr">
+            <a:noAutofit/>
+          </a:bodyPr>
           <a:lstStyle xmlns:a="http://schemas.openxmlformats.org/drawingml/2006/main"/>
           <a:p xmlns:a="http://schemas.openxmlformats.org/drawingml/2006/main">
             <a:pPr>
+              <a:buNone/>
               <a:defRPr sz="1350" b="1">
                 <a:solidFill>
                   <a:srgbClr val="28685E"/>
                 </a:solidFill>
+                <a:latin typeface="Arial"/>
+                <a:ea typeface="Arial"/>
+                <a:cs typeface="Arial"/>
               </a:defRPr>
             </a:pPr>
             <a:r>
@@ -4788,6 +5279,9 @@
                 <a:solidFill>
                   <a:srgbClr val="28685E"/>
                 </a:solidFill>
+                <a:latin typeface="Arial"/>
+                <a:ea typeface="Arial"/>
+                <a:cs typeface="Arial"/>
               </a:rPr>
               <a:t>05</a:t>
             </a:r>
@@ -4810,8 +5304,8 @@
         </p:nvSpPr>
         <p:spPr>
           <a:xfrm xmlns:a="http://schemas.openxmlformats.org/drawingml/2006/main">
-            <a:off x="609600" y="2619375"/>
-            <a:ext cx="10972800" cy="714375"/>
+            <a:off x="609600" y="2305050"/>
+            <a:ext cx="10972800" cy="704850"/>
           </a:xfrm>
           <a:prstGeom xmlns:a="http://schemas.openxmlformats.org/drawingml/2006/main" prst="rect">
             <a:avLst/>
@@ -4823,14 +5317,20 @@
           </a:ln>
         </p:spPr>
         <p:txBody>
-          <a:bodyPr xmlns:a="http://schemas.openxmlformats.org/drawingml/2006/main" lIns="0" tIns="0" rIns="0" bIns="0" anchor="ctr"/>
+          <a:bodyPr xmlns:a="http://schemas.openxmlformats.org/drawingml/2006/main" wrap="square" lIns="0" tIns="0" rIns="0" bIns="0" anchor="ctr">
+            <a:noAutofit/>
+          </a:bodyPr>
           <a:lstStyle xmlns:a="http://schemas.openxmlformats.org/drawingml/2006/main"/>
           <a:p xmlns:a="http://schemas.openxmlformats.org/drawingml/2006/main">
             <a:pPr>
+              <a:buNone/>
               <a:defRPr sz="2550" b="0">
                 <a:solidFill>
                   <a:srgbClr val="152B3A"/>
                 </a:solidFill>
+                <a:latin typeface="Arial"/>
+                <a:ea typeface="Arial"/>
+                <a:cs typeface="Arial"/>
               </a:defRPr>
             </a:pPr>
             <a:r>
@@ -4838,6 +5338,9 @@
                 <a:solidFill>
                   <a:srgbClr val="152B3A"/>
                 </a:solidFill>
+                <a:latin typeface="Arial"/>
+                <a:ea typeface="Arial"/>
+                <a:cs typeface="Arial"/>
               </a:rPr>
               <a:t>Let the bending string slacken.</a:t>
             </a:r>
@@ -4860,8 +5363,8 @@
         </p:nvSpPr>
         <p:spPr>
           <a:xfrm xmlns:a="http://schemas.openxmlformats.org/drawingml/2006/main">
-            <a:off x="609600" y="3409950"/>
-            <a:ext cx="10972800" cy="714375"/>
+            <a:off x="609600" y="3143250"/>
+            <a:ext cx="10972800" cy="704850"/>
           </a:xfrm>
           <a:prstGeom xmlns:a="http://schemas.openxmlformats.org/drawingml/2006/main" prst="rect">
             <a:avLst/>
@@ -4873,14 +5376,20 @@
           </a:ln>
         </p:spPr>
         <p:txBody>
-          <a:bodyPr xmlns:a="http://schemas.openxmlformats.org/drawingml/2006/main" lIns="0" tIns="0" rIns="0" bIns="0" anchor="ctr"/>
+          <a:bodyPr xmlns:a="http://schemas.openxmlformats.org/drawingml/2006/main" wrap="square" lIns="0" tIns="0" rIns="0" bIns="0" anchor="ctr">
+            <a:noAutofit/>
+          </a:bodyPr>
           <a:lstStyle xmlns:a="http://schemas.openxmlformats.org/drawingml/2006/main"/>
           <a:p xmlns:a="http://schemas.openxmlformats.org/drawingml/2006/main">
             <a:pPr>
+              <a:buNone/>
               <a:defRPr sz="2550" b="0">
                 <a:solidFill>
                   <a:srgbClr val="152B3A"/>
                 </a:solidFill>
+                <a:latin typeface="Arial"/>
+                <a:ea typeface="Arial"/>
+                <a:cs typeface="Arial"/>
               </a:defRPr>
             </a:pPr>
             <a:r>
@@ -4888,6 +5397,9 @@
                 <a:solidFill>
                   <a:srgbClr val="152B3A"/>
                 </a:solidFill>
+                <a:latin typeface="Arial"/>
+                <a:ea typeface="Arial"/>
+                <a:cs typeface="Arial"/>
               </a:rPr>
               <a:t>Gently use the opposite pull.</a:t>
             </a:r>
@@ -4910,8 +5422,8 @@
         </p:nvSpPr>
         <p:spPr>
           <a:xfrm xmlns:a="http://schemas.openxmlformats.org/drawingml/2006/main">
-            <a:off x="609600" y="4200525"/>
-            <a:ext cx="10972800" cy="714375"/>
+            <a:off x="609600" y="3981450"/>
+            <a:ext cx="10972800" cy="704850"/>
           </a:xfrm>
           <a:prstGeom xmlns:a="http://schemas.openxmlformats.org/drawingml/2006/main" prst="rect">
             <a:avLst/>
@@ -4923,14 +5435,20 @@
           </a:ln>
         </p:spPr>
         <p:txBody>
-          <a:bodyPr xmlns:a="http://schemas.openxmlformats.org/drawingml/2006/main" lIns="0" tIns="0" rIns="0" bIns="0" anchor="ctr"/>
+          <a:bodyPr xmlns:a="http://schemas.openxmlformats.org/drawingml/2006/main" wrap="square" lIns="0" tIns="0" rIns="0" bIns="0" anchor="ctr">
+            <a:noAutofit/>
+          </a:bodyPr>
           <a:lstStyle xmlns:a="http://schemas.openxmlformats.org/drawingml/2006/main"/>
           <a:p xmlns:a="http://schemas.openxmlformats.org/drawingml/2006/main">
             <a:pPr>
+              <a:buNone/>
               <a:defRPr sz="2550" b="0">
                 <a:solidFill>
                   <a:srgbClr val="152B3A"/>
                 </a:solidFill>
+                <a:latin typeface="Arial"/>
+                <a:ea typeface="Arial"/>
+                <a:cs typeface="Arial"/>
               </a:defRPr>
             </a:pPr>
             <a:r>
@@ -4938,6 +5456,9 @@
                 <a:solidFill>
                   <a:srgbClr val="152B3A"/>
                 </a:solidFill>
+                <a:latin typeface="Arial"/>
+                <a:ea typeface="Arial"/>
+                <a:cs typeface="Arial"/>
               </a:rPr>
               <a:t>Place TRICEPS — CONTRACTS.</a:t>
             </a:r>
@@ -4960,8 +5481,8 @@
         </p:nvSpPr>
         <p:spPr>
           <a:xfrm xmlns:a="http://schemas.openxmlformats.org/drawingml/2006/main">
-            <a:off x="609600" y="4991100"/>
-            <a:ext cx="10972800" cy="714375"/>
+            <a:off x="609600" y="4819650"/>
+            <a:ext cx="10972800" cy="704850"/>
           </a:xfrm>
           <a:prstGeom xmlns:a="http://schemas.openxmlformats.org/drawingml/2006/main" prst="rect">
             <a:avLst/>
@@ -4973,21 +5494,30 @@
           </a:ln>
         </p:spPr>
         <p:txBody>
-          <a:bodyPr xmlns:a="http://schemas.openxmlformats.org/drawingml/2006/main" lIns="0" tIns="0" rIns="0" bIns="0" anchor="ctr"/>
+          <a:bodyPr xmlns:a="http://schemas.openxmlformats.org/drawingml/2006/main" wrap="square" lIns="0" tIns="0" rIns="0" bIns="0" anchor="ctr">
+            <a:noAutofit/>
+          </a:bodyPr>
           <a:lstStyle xmlns:a="http://schemas.openxmlformats.org/drawingml/2006/main"/>
           <a:p xmlns:a="http://schemas.openxmlformats.org/drawingml/2006/main">
             <a:pPr>
-              <a:defRPr sz="2550" b="0">
-                <a:solidFill>
-                  <a:srgbClr val="152B3A"/>
-                </a:solidFill>
+              <a:buNone/>
+              <a:defRPr sz="2550" b="1">
+                <a:solidFill>
+                  <a:srgbClr val="28685E"/>
+                </a:solidFill>
+                <a:latin typeface="Arial"/>
+                <a:ea typeface="Arial"/>
+                <a:cs typeface="Arial"/>
               </a:defRPr>
             </a:pPr>
             <a:r>
-              <a:rPr sz="2550" b="0">
-                <a:solidFill>
-                  <a:srgbClr val="152B3A"/>
-                </a:solidFill>
+              <a:rPr sz="2550" b="1">
+                <a:solidFill>
+                  <a:srgbClr val="28685E"/>
+                </a:solidFill>
+                <a:latin typeface="Arial"/>
+                <a:ea typeface="Arial"/>
+                <a:cs typeface="Arial"/>
               </a:rPr>
               <a:t>Place BICEPS — RELAXES.</a:t>
             </a:r>
@@ -5010,7 +5540,7 @@
     <p:bg>
       <p:bgPr>
         <a:solidFill xmlns:a="http://schemas.openxmlformats.org/drawingml/2006/main">
-          <a:srgbClr val="F5F1E8"/>
+          <a:srgbClr val="FBF9F3"/>
         </a:solidFill>
       </p:bgPr>
     </p:bg>
@@ -5039,8 +5569,8 @@
         </p:nvSpPr>
         <p:spPr>
           <a:xfrm xmlns:a="http://schemas.openxmlformats.org/drawingml/2006/main">
-            <a:off x="609600" y="552450"/>
-            <a:ext cx="781050" cy="57150"/>
+            <a:off x="609600" y="742950"/>
+            <a:ext cx="9906000" cy="38100"/>
           </a:xfrm>
           <a:prstGeom xmlns:a="http://schemas.openxmlformats.org/drawingml/2006/main" prst="rect">
             <a:avLst/>
@@ -5070,8 +5600,8 @@
         </p:nvSpPr>
         <p:spPr>
           <a:xfrm xmlns:a="http://schemas.openxmlformats.org/drawingml/2006/main">
-            <a:off x="609600" y="762000"/>
-            <a:ext cx="9334500" cy="285750"/>
+            <a:off x="609600" y="342900"/>
+            <a:ext cx="9334500" cy="266700"/>
           </a:xfrm>
           <a:prstGeom xmlns:a="http://schemas.openxmlformats.org/drawingml/2006/main" prst="rect">
             <a:avLst/>
@@ -5083,21 +5613,30 @@
           </a:ln>
         </p:spPr>
         <p:txBody>
-          <a:bodyPr xmlns:a="http://schemas.openxmlformats.org/drawingml/2006/main" lIns="0" tIns="0" rIns="0" bIns="0" anchor="ctr"/>
+          <a:bodyPr xmlns:a="http://schemas.openxmlformats.org/drawingml/2006/main" wrap="square" lIns="0" tIns="0" rIns="0" bIns="0" anchor="ctr">
+            <a:noAutofit/>
+          </a:bodyPr>
           <a:lstStyle xmlns:a="http://schemas.openxmlformats.org/drawingml/2006/main"/>
           <a:p xmlns:a="http://schemas.openxmlformats.org/drawingml/2006/main">
             <a:pPr>
-              <a:defRPr sz="1500" b="1">
+              <a:buNone/>
+              <a:defRPr sz="1425" b="1">
                 <a:solidFill>
                   <a:srgbClr val="28685E"/>
                 </a:solidFill>
+                <a:latin typeface="Arial"/>
+                <a:ea typeface="Arial"/>
+                <a:cs typeface="Arial"/>
               </a:defRPr>
             </a:pPr>
             <a:r>
-              <a:rPr sz="1500" b="1">
+              <a:rPr sz="1425" b="1">
                 <a:solidFill>
                   <a:srgbClr val="28685E"/>
                 </a:solidFill>
+                <a:latin typeface="Arial"/>
+                <a:ea typeface="Arial"/>
+                <a:cs typeface="Arial"/>
               </a:rPr>
               <a:t>MADE BY MATT  /  BUILD SCIENCE</a:t>
             </a:r>
@@ -5106,14 +5645,14 @@
       </p:sp>
       <p:pic>
         <p:nvPicPr>
-          <p:cNvPr id="14" name=""/>
+          <p:cNvPr id="16" name=""/>
           <p:cNvPicPr>
             <a:picLocks xmlns:a="http://schemas.openxmlformats.org/drawingml/2006/main" noChangeAspect="1"/>
           </p:cNvPicPr>
           <p:nvPr/>
         </p:nvPicPr>
         <p:blipFill>
-          <a:blip xmlns:r="http://schemas.openxmlformats.org/officeDocument/2006/relationships" xmlns:a="http://schemas.openxmlformats.org/drawingml/2006/main" r:embed="R1dea49cb426b4519"/>
+          <a:blip xmlns:r="http://schemas.openxmlformats.org/officeDocument/2006/relationships" xmlns:a="http://schemas.openxmlformats.org/drawingml/2006/main" r:embed="Ra2a58ae50d9b45ed"/>
           <a:stretch xmlns:a="http://schemas.openxmlformats.org/drawingml/2006/main"/>
         </p:blipFill>
         <p:spPr>
@@ -5142,8 +5681,8 @@
         </p:nvSpPr>
         <p:spPr>
           <a:xfrm xmlns:a="http://schemas.openxmlformats.org/drawingml/2006/main">
-            <a:off x="609600" y="1352550"/>
-            <a:ext cx="10972800" cy="952500"/>
+            <a:off x="609600" y="1047750"/>
+            <a:ext cx="10972800" cy="895350"/>
           </a:xfrm>
           <a:prstGeom xmlns:a="http://schemas.openxmlformats.org/drawingml/2006/main" prst="rect">
             <a:avLst/>
@@ -5155,21 +5694,30 @@
           </a:ln>
         </p:spPr>
         <p:txBody>
-          <a:bodyPr xmlns:a="http://schemas.openxmlformats.org/drawingml/2006/main" lIns="0" tIns="0" rIns="0" bIns="0" anchor="ctr"/>
+          <a:bodyPr xmlns:a="http://schemas.openxmlformats.org/drawingml/2006/main" wrap="square" lIns="0" tIns="0" rIns="0" bIns="0" anchor="ctr">
+            <a:noAutofit/>
+          </a:bodyPr>
           <a:lstStyle xmlns:a="http://schemas.openxmlformats.org/drawingml/2006/main"/>
           <a:p xmlns:a="http://schemas.openxmlformats.org/drawingml/2006/main">
             <a:pPr>
-              <a:defRPr sz="3750" b="1">
+              <a:buNone/>
+              <a:defRPr sz="3600" b="1">
                 <a:solidFill>
                   <a:srgbClr val="152B3A"/>
                 </a:solidFill>
+                <a:latin typeface="Arial"/>
+                <a:ea typeface="Arial"/>
+                <a:cs typeface="Arial"/>
               </a:defRPr>
             </a:pPr>
             <a:r>
-              <a:rPr sz="3750" b="1">
+              <a:rPr sz="3600" b="1">
                 <a:solidFill>
                   <a:srgbClr val="152B3A"/>
                 </a:solidFill>
+                <a:latin typeface="Arial"/>
+                <a:ea typeface="Arial"/>
+                <a:cs typeface="Arial"/>
               </a:rPr>
               <a:t>Explain both actions with labels</a:t>
             </a:r>
@@ -5236,21 +5784,30 @@
           </a:ln>
         </p:spPr>
         <p:txBody>
-          <a:bodyPr xmlns:a="http://schemas.openxmlformats.org/drawingml/2006/main" lIns="0" tIns="0" rIns="0" bIns="0" anchor="ctr"/>
+          <a:bodyPr xmlns:a="http://schemas.openxmlformats.org/drawingml/2006/main" wrap="square" lIns="0" tIns="0" rIns="0" bIns="0" anchor="ctr">
+            <a:noAutofit/>
+          </a:bodyPr>
           <a:lstStyle xmlns:a="http://schemas.openxmlformats.org/drawingml/2006/main"/>
           <a:p xmlns:a="http://schemas.openxmlformats.org/drawingml/2006/main">
             <a:pPr>
-              <a:defRPr sz="1275" b="0">
+              <a:buNone/>
+              <a:defRPr sz="1200" b="0">
                 <a:solidFill>
                   <a:srgbClr val="50616B"/>
                 </a:solidFill>
+                <a:latin typeface="Arial"/>
+                <a:ea typeface="Arial"/>
+                <a:cs typeface="Arial"/>
               </a:defRPr>
             </a:pPr>
             <a:r>
-              <a:rPr sz="1275" b="0">
+              <a:rPr sz="1200" b="0">
                 <a:solidFill>
                   <a:srgbClr val="50616B"/>
                 </a:solidFill>
+                <a:latin typeface="Arial"/>
+                <a:ea typeface="Arial"/>
+                <a:cs typeface="Arial"/>
               </a:rPr>
               <a:t>AUTUMN 1  ·  WEEK 4  ·  LESSON B</a:t>
             </a:r>
@@ -5286,14 +5843,20 @@
           </a:ln>
         </p:spPr>
         <p:txBody>
-          <a:bodyPr xmlns:a="http://schemas.openxmlformats.org/drawingml/2006/main" lIns="0" tIns="0" rIns="0" bIns="0" anchor="ctr"/>
+          <a:bodyPr xmlns:a="http://schemas.openxmlformats.org/drawingml/2006/main" wrap="square" lIns="0" tIns="0" rIns="0" bIns="0" anchor="ctr">
+            <a:noAutofit/>
+          </a:bodyPr>
           <a:lstStyle xmlns:a="http://schemas.openxmlformats.org/drawingml/2006/main"/>
           <a:p xmlns:a="http://schemas.openxmlformats.org/drawingml/2006/main">
             <a:pPr>
+              <a:buNone/>
               <a:defRPr sz="1350" b="1">
                 <a:solidFill>
                   <a:srgbClr val="28685E"/>
                 </a:solidFill>
+                <a:latin typeface="Arial"/>
+                <a:ea typeface="Arial"/>
+                <a:cs typeface="Arial"/>
               </a:defRPr>
             </a:pPr>
             <a:r>
@@ -5301,6 +5864,9 @@
                 <a:solidFill>
                   <a:srgbClr val="28685E"/>
                 </a:solidFill>
+                <a:latin typeface="Arial"/>
+                <a:ea typeface="Arial"/>
+                <a:cs typeface="Arial"/>
               </a:rPr>
               <a:t>06</a:t>
             </a:r>
@@ -5323,8 +5889,8 @@
         </p:nvSpPr>
         <p:spPr>
           <a:xfrm xmlns:a="http://schemas.openxmlformats.org/drawingml/2006/main">
-            <a:off x="609600" y="2619375"/>
-            <a:ext cx="10972800" cy="714375"/>
+            <a:off x="609600" y="2305050"/>
+            <a:ext cx="10972800" cy="704850"/>
           </a:xfrm>
           <a:prstGeom xmlns:a="http://schemas.openxmlformats.org/drawingml/2006/main" prst="rect">
             <a:avLst/>
@@ -5336,14 +5902,20 @@
           </a:ln>
         </p:spPr>
         <p:txBody>
-          <a:bodyPr xmlns:a="http://schemas.openxmlformats.org/drawingml/2006/main" lIns="0" tIns="0" rIns="0" bIns="0" anchor="ctr"/>
+          <a:bodyPr xmlns:a="http://schemas.openxmlformats.org/drawingml/2006/main" wrap="square" lIns="0" tIns="0" rIns="0" bIns="0" anchor="ctr">
+            <a:noAutofit/>
+          </a:bodyPr>
           <a:lstStyle xmlns:a="http://schemas.openxmlformats.org/drawingml/2006/main"/>
           <a:p xmlns:a="http://schemas.openxmlformats.org/drawingml/2006/main">
             <a:pPr>
+              <a:buNone/>
               <a:defRPr sz="2550" b="0">
                 <a:solidFill>
                   <a:srgbClr val="152B3A"/>
                 </a:solidFill>
+                <a:latin typeface="Arial"/>
+                <a:ea typeface="Arial"/>
+                <a:cs typeface="Arial"/>
               </a:defRPr>
             </a:pPr>
             <a:r>
@@ -5351,6 +5923,9 @@
                 <a:solidFill>
                   <a:srgbClr val="152B3A"/>
                 </a:solidFill>
+                <a:latin typeface="Arial"/>
+                <a:ea typeface="Arial"/>
+                <a:cs typeface="Arial"/>
               </a:rPr>
               <a:t>Direct a bend, then an active straighten.</a:t>
             </a:r>
@@ -5373,8 +5948,8 @@
         </p:nvSpPr>
         <p:spPr>
           <a:xfrm xmlns:a="http://schemas.openxmlformats.org/drawingml/2006/main">
-            <a:off x="609600" y="3409950"/>
-            <a:ext cx="10972800" cy="714375"/>
+            <a:off x="609600" y="3143250"/>
+            <a:ext cx="10972800" cy="704850"/>
           </a:xfrm>
           <a:prstGeom xmlns:a="http://schemas.openxmlformats.org/drawingml/2006/main" prst="rect">
             <a:avLst/>
@@ -5386,14 +5961,20 @@
           </a:ln>
         </p:spPr>
         <p:txBody>
-          <a:bodyPr xmlns:a="http://schemas.openxmlformats.org/drawingml/2006/main" lIns="0" tIns="0" rIns="0" bIns="0" anchor="ctr"/>
+          <a:bodyPr xmlns:a="http://schemas.openxmlformats.org/drawingml/2006/main" wrap="square" lIns="0" tIns="0" rIns="0" bIns="0" anchor="ctr">
+            <a:noAutofit/>
+          </a:bodyPr>
           <a:lstStyle xmlns:a="http://schemas.openxmlformats.org/drawingml/2006/main"/>
           <a:p xmlns:a="http://schemas.openxmlformats.org/drawingml/2006/main">
             <a:pPr>
+              <a:buNone/>
               <a:defRPr sz="2550" b="0">
                 <a:solidFill>
                   <a:srgbClr val="152B3A"/>
                 </a:solidFill>
+                <a:latin typeface="Arial"/>
+                <a:ea typeface="Arial"/>
+                <a:cs typeface="Arial"/>
               </a:defRPr>
             </a:pPr>
             <a:r>
@@ -5401,6 +5982,9 @@
                 <a:solidFill>
                   <a:srgbClr val="152B3A"/>
                 </a:solidFill>
+                <a:latin typeface="Arial"/>
+                <a:ea typeface="Arial"/>
+                <a:cs typeface="Arial"/>
               </a:rPr>
               <a:t>Name the contracting muscle each time.</a:t>
             </a:r>
@@ -5423,8 +6007,8 @@
         </p:nvSpPr>
         <p:spPr>
           <a:xfrm xmlns:a="http://schemas.openxmlformats.org/drawingml/2006/main">
-            <a:off x="609600" y="4200525"/>
-            <a:ext cx="10972800" cy="714375"/>
+            <a:off x="609600" y="3981450"/>
+            <a:ext cx="10972800" cy="704850"/>
           </a:xfrm>
           <a:prstGeom xmlns:a="http://schemas.openxmlformats.org/drawingml/2006/main" prst="rect">
             <a:avLst/>
@@ -5436,14 +6020,20 @@
           </a:ln>
         </p:spPr>
         <p:txBody>
-          <a:bodyPr xmlns:a="http://schemas.openxmlformats.org/drawingml/2006/main" lIns="0" tIns="0" rIns="0" bIns="0" anchor="ctr"/>
+          <a:bodyPr xmlns:a="http://schemas.openxmlformats.org/drawingml/2006/main" wrap="square" lIns="0" tIns="0" rIns="0" bIns="0" anchor="ctr">
+            <a:noAutofit/>
+          </a:bodyPr>
           <a:lstStyle xmlns:a="http://schemas.openxmlformats.org/drawingml/2006/main"/>
           <a:p xmlns:a="http://schemas.openxmlformats.org/drawingml/2006/main">
             <a:pPr>
+              <a:buNone/>
               <a:defRPr sz="2550" b="0">
                 <a:solidFill>
                   <a:srgbClr val="152B3A"/>
                 </a:solidFill>
+                <a:latin typeface="Arial"/>
+                <a:ea typeface="Arial"/>
+                <a:cs typeface="Arial"/>
               </a:defRPr>
             </a:pPr>
             <a:r>
@@ -5451,6 +6041,9 @@
                 <a:solidFill>
                   <a:srgbClr val="152B3A"/>
                 </a:solidFill>
+                <a:latin typeface="Arial"/>
+                <a:ea typeface="Arial"/>
+                <a:cs typeface="Arial"/>
               </a:rPr>
               <a:t>Say what happens to its partner.</a:t>
             </a:r>
@@ -5473,8 +6066,8 @@
         </p:nvSpPr>
         <p:spPr>
           <a:xfrm xmlns:a="http://schemas.openxmlformats.org/drawingml/2006/main">
-            <a:off x="609600" y="4991100"/>
-            <a:ext cx="10972800" cy="714375"/>
+            <a:off x="609600" y="4819650"/>
+            <a:ext cx="10972800" cy="704850"/>
           </a:xfrm>
           <a:prstGeom xmlns:a="http://schemas.openxmlformats.org/drawingml/2006/main" prst="rect">
             <a:avLst/>
@@ -5486,21 +6079,30 @@
           </a:ln>
         </p:spPr>
         <p:txBody>
-          <a:bodyPr xmlns:a="http://schemas.openxmlformats.org/drawingml/2006/main" lIns="0" tIns="0" rIns="0" bIns="0" anchor="ctr"/>
+          <a:bodyPr xmlns:a="http://schemas.openxmlformats.org/drawingml/2006/main" wrap="square" lIns="0" tIns="0" rIns="0" bIns="0" anchor="ctr">
+            <a:noAutofit/>
+          </a:bodyPr>
           <a:lstStyle xmlns:a="http://schemas.openxmlformats.org/drawingml/2006/main"/>
           <a:p xmlns:a="http://schemas.openxmlformats.org/drawingml/2006/main">
             <a:pPr>
-              <a:defRPr sz="2550" b="0">
-                <a:solidFill>
-                  <a:srgbClr val="152B3A"/>
-                </a:solidFill>
+              <a:buNone/>
+              <a:defRPr sz="2550" b="1">
+                <a:solidFill>
+                  <a:srgbClr val="28685E"/>
+                </a:solidFill>
+                <a:latin typeface="Arial"/>
+                <a:ea typeface="Arial"/>
+                <a:cs typeface="Arial"/>
               </a:defRPr>
             </a:pPr>
             <a:r>
-              <a:rPr sz="2550" b="0">
-                <a:solidFill>
-                  <a:srgbClr val="152B3A"/>
-                </a:solidFill>
+              <a:rPr sz="2550" b="1">
+                <a:solidFill>
+                  <a:srgbClr val="28685E"/>
+                </a:solidFill>
+                <a:latin typeface="Arial"/>
+                <a:ea typeface="Arial"/>
+                <a:cs typeface="Arial"/>
               </a:rPr>
               <a:t>Record the actions in your table.</a:t>
             </a:r>
@@ -5523,7 +6125,7 @@
     <p:bg>
       <p:bgPr>
         <a:solidFill xmlns:a="http://schemas.openxmlformats.org/drawingml/2006/main">
-          <a:srgbClr val="F5F1E8"/>
+          <a:srgbClr val="FBF9F3"/>
         </a:solidFill>
       </p:bgPr>
     </p:bg>
@@ -5552,8 +6154,8 @@
         </p:nvSpPr>
         <p:spPr>
           <a:xfrm xmlns:a="http://schemas.openxmlformats.org/drawingml/2006/main">
-            <a:off x="609600" y="552450"/>
-            <a:ext cx="781050" cy="57150"/>
+            <a:off x="609600" y="742950"/>
+            <a:ext cx="9906000" cy="38100"/>
           </a:xfrm>
           <a:prstGeom xmlns:a="http://schemas.openxmlformats.org/drawingml/2006/main" prst="rect">
             <a:avLst/>
@@ -5583,8 +6185,8 @@
         </p:nvSpPr>
         <p:spPr>
           <a:xfrm xmlns:a="http://schemas.openxmlformats.org/drawingml/2006/main">
-            <a:off x="609600" y="762000"/>
-            <a:ext cx="9334500" cy="285750"/>
+            <a:off x="609600" y="342900"/>
+            <a:ext cx="9334500" cy="266700"/>
           </a:xfrm>
           <a:prstGeom xmlns:a="http://schemas.openxmlformats.org/drawingml/2006/main" prst="rect">
             <a:avLst/>
@@ -5596,21 +6198,30 @@
           </a:ln>
         </p:spPr>
         <p:txBody>
-          <a:bodyPr xmlns:a="http://schemas.openxmlformats.org/drawingml/2006/main" lIns="0" tIns="0" rIns="0" bIns="0" anchor="ctr"/>
+          <a:bodyPr xmlns:a="http://schemas.openxmlformats.org/drawingml/2006/main" wrap="square" lIns="0" tIns="0" rIns="0" bIns="0" anchor="ctr">
+            <a:noAutofit/>
+          </a:bodyPr>
           <a:lstStyle xmlns:a="http://schemas.openxmlformats.org/drawingml/2006/main"/>
           <a:p xmlns:a="http://schemas.openxmlformats.org/drawingml/2006/main">
             <a:pPr>
-              <a:defRPr sz="1500" b="1">
+              <a:buNone/>
+              <a:defRPr sz="1425" b="1">
                 <a:solidFill>
                   <a:srgbClr val="28685E"/>
                 </a:solidFill>
+                <a:latin typeface="Arial"/>
+                <a:ea typeface="Arial"/>
+                <a:cs typeface="Arial"/>
               </a:defRPr>
             </a:pPr>
             <a:r>
-              <a:rPr sz="1500" b="1">
+              <a:rPr sz="1425" b="1">
                 <a:solidFill>
                   <a:srgbClr val="28685E"/>
                 </a:solidFill>
+                <a:latin typeface="Arial"/>
+                <a:ea typeface="Arial"/>
+                <a:cs typeface="Arial"/>
               </a:rPr>
               <a:t>MADE BY MATT  /  BUILD SCIENCE</a:t>
             </a:r>
@@ -5619,14 +6230,14 @@
       </p:sp>
       <p:pic>
         <p:nvPicPr>
-          <p:cNvPr id="13" name=""/>
+          <p:cNvPr id="15" name=""/>
           <p:cNvPicPr>
             <a:picLocks xmlns:a="http://schemas.openxmlformats.org/drawingml/2006/main" noChangeAspect="1"/>
           </p:cNvPicPr>
           <p:nvPr/>
         </p:nvPicPr>
         <p:blipFill>
-          <a:blip xmlns:r="http://schemas.openxmlformats.org/officeDocument/2006/relationships" xmlns:a="http://schemas.openxmlformats.org/drawingml/2006/main" r:embed="R536cadcab477449b"/>
+          <a:blip xmlns:r="http://schemas.openxmlformats.org/officeDocument/2006/relationships" xmlns:a="http://schemas.openxmlformats.org/drawingml/2006/main" r:embed="Ref7387532ead4510"/>
           <a:stretch xmlns:a="http://schemas.openxmlformats.org/drawingml/2006/main"/>
         </p:blipFill>
         <p:spPr>
@@ -5655,8 +6266,8 @@
         </p:nvSpPr>
         <p:spPr>
           <a:xfrm xmlns:a="http://schemas.openxmlformats.org/drawingml/2006/main">
-            <a:off x="609600" y="1352550"/>
-            <a:ext cx="10972800" cy="952500"/>
+            <a:off x="609600" y="1047750"/>
+            <a:ext cx="10972800" cy="895350"/>
           </a:xfrm>
           <a:prstGeom xmlns:a="http://schemas.openxmlformats.org/drawingml/2006/main" prst="rect">
             <a:avLst/>
@@ -5668,21 +6279,30 @@
           </a:ln>
         </p:spPr>
         <p:txBody>
-          <a:bodyPr xmlns:a="http://schemas.openxmlformats.org/drawingml/2006/main" lIns="0" tIns="0" rIns="0" bIns="0" anchor="ctr"/>
+          <a:bodyPr xmlns:a="http://schemas.openxmlformats.org/drawingml/2006/main" wrap="square" lIns="0" tIns="0" rIns="0" bIns="0" anchor="ctr">
+            <a:noAutofit/>
+          </a:bodyPr>
           <a:lstStyle xmlns:a="http://schemas.openxmlformats.org/drawingml/2006/main"/>
           <a:p xmlns:a="http://schemas.openxmlformats.org/drawingml/2006/main">
             <a:pPr>
-              <a:defRPr sz="3750" b="1">
+              <a:buNone/>
+              <a:defRPr sz="3600" b="1">
                 <a:solidFill>
                   <a:srgbClr val="152B3A"/>
                 </a:solidFill>
+                <a:latin typeface="Arial"/>
+                <a:ea typeface="Arial"/>
+                <a:cs typeface="Arial"/>
               </a:defRPr>
             </a:pPr>
             <a:r>
-              <a:rPr sz="3750" b="1">
+              <a:rPr sz="3600" b="1">
                 <a:solidFill>
                   <a:srgbClr val="152B3A"/>
                 </a:solidFill>
+                <a:latin typeface="Arial"/>
+                <a:ea typeface="Arial"/>
+                <a:cs typeface="Arial"/>
               </a:rPr>
               <a:t>Pause and check your model</a:t>
             </a:r>
@@ -5749,21 +6369,30 @@
           </a:ln>
         </p:spPr>
         <p:txBody>
-          <a:bodyPr xmlns:a="http://schemas.openxmlformats.org/drawingml/2006/main" lIns="0" tIns="0" rIns="0" bIns="0" anchor="ctr"/>
+          <a:bodyPr xmlns:a="http://schemas.openxmlformats.org/drawingml/2006/main" wrap="square" lIns="0" tIns="0" rIns="0" bIns="0" anchor="ctr">
+            <a:noAutofit/>
+          </a:bodyPr>
           <a:lstStyle xmlns:a="http://schemas.openxmlformats.org/drawingml/2006/main"/>
           <a:p xmlns:a="http://schemas.openxmlformats.org/drawingml/2006/main">
             <a:pPr>
-              <a:defRPr sz="1275" b="0">
+              <a:buNone/>
+              <a:defRPr sz="1200" b="0">
                 <a:solidFill>
                   <a:srgbClr val="50616B"/>
                 </a:solidFill>
+                <a:latin typeface="Arial"/>
+                <a:ea typeface="Arial"/>
+                <a:cs typeface="Arial"/>
               </a:defRPr>
             </a:pPr>
             <a:r>
-              <a:rPr sz="1275" b="0">
+              <a:rPr sz="1200" b="0">
                 <a:solidFill>
                   <a:srgbClr val="50616B"/>
                 </a:solidFill>
+                <a:latin typeface="Arial"/>
+                <a:ea typeface="Arial"/>
+                <a:cs typeface="Arial"/>
               </a:rPr>
               <a:t>AUTUMN 1  ·  WEEK 4  ·  LESSON B</a:t>
             </a:r>
@@ -5799,14 +6428,20 @@
           </a:ln>
         </p:spPr>
         <p:txBody>
-          <a:bodyPr xmlns:a="http://schemas.openxmlformats.org/drawingml/2006/main" lIns="0" tIns="0" rIns="0" bIns="0" anchor="ctr"/>
+          <a:bodyPr xmlns:a="http://schemas.openxmlformats.org/drawingml/2006/main" wrap="square" lIns="0" tIns="0" rIns="0" bIns="0" anchor="ctr">
+            <a:noAutofit/>
+          </a:bodyPr>
           <a:lstStyle xmlns:a="http://schemas.openxmlformats.org/drawingml/2006/main"/>
           <a:p xmlns:a="http://schemas.openxmlformats.org/drawingml/2006/main">
             <a:pPr>
+              <a:buNone/>
               <a:defRPr sz="1350" b="1">
                 <a:solidFill>
                   <a:srgbClr val="28685E"/>
                 </a:solidFill>
+                <a:latin typeface="Arial"/>
+                <a:ea typeface="Arial"/>
+                <a:cs typeface="Arial"/>
               </a:defRPr>
             </a:pPr>
             <a:r>
@@ -5814,6 +6449,9 @@
                 <a:solidFill>
                   <a:srgbClr val="28685E"/>
                 </a:solidFill>
+                <a:latin typeface="Arial"/>
+                <a:ea typeface="Arial"/>
+                <a:cs typeface="Arial"/>
               </a:rPr>
               <a:t>07</a:t>
             </a:r>
@@ -5836,8 +6474,8 @@
         </p:nvSpPr>
         <p:spPr>
           <a:xfrm xmlns:a="http://schemas.openxmlformats.org/drawingml/2006/main">
-            <a:off x="609600" y="2619375"/>
-            <a:ext cx="10972800" cy="781050"/>
+            <a:off x="609600" y="2305050"/>
+            <a:ext cx="10972800" cy="914400"/>
           </a:xfrm>
           <a:prstGeom xmlns:a="http://schemas.openxmlformats.org/drawingml/2006/main" prst="rect">
             <a:avLst/>
@@ -5849,14 +6487,20 @@
           </a:ln>
         </p:spPr>
         <p:txBody>
-          <a:bodyPr xmlns:a="http://schemas.openxmlformats.org/drawingml/2006/main" lIns="0" tIns="0" rIns="0" bIns="0" anchor="ctr"/>
+          <a:bodyPr xmlns:a="http://schemas.openxmlformats.org/drawingml/2006/main" wrap="square" lIns="0" tIns="0" rIns="0" bIns="0" anchor="ctr">
+            <a:noAutofit/>
+          </a:bodyPr>
           <a:lstStyle xmlns:a="http://schemas.openxmlformats.org/drawingml/2006/main"/>
           <a:p xmlns:a="http://schemas.openxmlformats.org/drawingml/2006/main">
             <a:pPr>
+              <a:buNone/>
               <a:defRPr sz="2550" b="0">
                 <a:solidFill>
                   <a:srgbClr val="152B3A"/>
                 </a:solidFill>
+                <a:latin typeface="Arial"/>
+                <a:ea typeface="Arial"/>
+                <a:cs typeface="Arial"/>
               </a:defRPr>
             </a:pPr>
             <a:r>
@@ -5864,6 +6508,9 @@
                 <a:solidFill>
                   <a:srgbClr val="152B3A"/>
                 </a:solidFill>
+                <a:latin typeface="Arial"/>
+                <a:ea typeface="Arial"/>
+                <a:cs typeface="Arial"/>
               </a:rPr>
               <a:t>Can the join turn without forcing it?</a:t>
             </a:r>
@@ -5886,8 +6533,8 @@
         </p:nvSpPr>
         <p:spPr>
           <a:xfrm xmlns:a="http://schemas.openxmlformats.org/drawingml/2006/main">
-            <a:off x="609600" y="3476625"/>
-            <a:ext cx="10972800" cy="781050"/>
+            <a:off x="609600" y="3352800"/>
+            <a:ext cx="10972800" cy="914400"/>
           </a:xfrm>
           <a:prstGeom xmlns:a="http://schemas.openxmlformats.org/drawingml/2006/main" prst="rect">
             <a:avLst/>
@@ -5899,14 +6546,20 @@
           </a:ln>
         </p:spPr>
         <p:txBody>
-          <a:bodyPr xmlns:a="http://schemas.openxmlformats.org/drawingml/2006/main" lIns="0" tIns="0" rIns="0" bIns="0" anchor="ctr"/>
+          <a:bodyPr xmlns:a="http://schemas.openxmlformats.org/drawingml/2006/main" wrap="square" lIns="0" tIns="0" rIns="0" bIns="0" anchor="ctr">
+            <a:noAutofit/>
+          </a:bodyPr>
           <a:lstStyle xmlns:a="http://schemas.openxmlformats.org/drawingml/2006/main"/>
           <a:p xmlns:a="http://schemas.openxmlformats.org/drawingml/2006/main">
             <a:pPr>
+              <a:buNone/>
               <a:defRPr sz="2550" b="0">
                 <a:solidFill>
                   <a:srgbClr val="152B3A"/>
                 </a:solidFill>
+                <a:latin typeface="Arial"/>
+                <a:ea typeface="Arial"/>
+                <a:cs typeface="Arial"/>
               </a:defRPr>
             </a:pPr>
             <a:r>
@@ -5914,6 +6567,9 @@
                 <a:solidFill>
                   <a:srgbClr val="152B3A"/>
                 </a:solidFill>
+                <a:latin typeface="Arial"/>
+                <a:ea typeface="Arial"/>
+                <a:cs typeface="Arial"/>
               </a:rPr>
               <a:t>Is there a pull for each direction?</a:t>
             </a:r>
@@ -5936,8 +6592,8 @@
         </p:nvSpPr>
         <p:spPr>
           <a:xfrm xmlns:a="http://schemas.openxmlformats.org/drawingml/2006/main">
-            <a:off x="609600" y="4333875"/>
-            <a:ext cx="10972800" cy="781050"/>
+            <a:off x="609600" y="4400550"/>
+            <a:ext cx="10972800" cy="914400"/>
           </a:xfrm>
           <a:prstGeom xmlns:a="http://schemas.openxmlformats.org/drawingml/2006/main" prst="rect">
             <a:avLst/>
@@ -5949,21 +6605,30 @@
           </a:ln>
         </p:spPr>
         <p:txBody>
-          <a:bodyPr xmlns:a="http://schemas.openxmlformats.org/drawingml/2006/main" lIns="0" tIns="0" rIns="0" bIns="0" anchor="ctr"/>
+          <a:bodyPr xmlns:a="http://schemas.openxmlformats.org/drawingml/2006/main" wrap="square" lIns="0" tIns="0" rIns="0" bIns="0" anchor="ctr">
+            <a:noAutofit/>
+          </a:bodyPr>
           <a:lstStyle xmlns:a="http://schemas.openxmlformats.org/drawingml/2006/main"/>
           <a:p xmlns:a="http://schemas.openxmlformats.org/drawingml/2006/main">
             <a:pPr>
-              <a:defRPr sz="2550" b="0">
-                <a:solidFill>
-                  <a:srgbClr val="152B3A"/>
-                </a:solidFill>
+              <a:buNone/>
+              <a:defRPr sz="2550" b="1">
+                <a:solidFill>
+                  <a:srgbClr val="28685E"/>
+                </a:solidFill>
+                <a:latin typeface="Arial"/>
+                <a:ea typeface="Arial"/>
+                <a:cs typeface="Arial"/>
               </a:defRPr>
             </a:pPr>
             <a:r>
-              <a:rPr sz="2550" b="0">
-                <a:solidFill>
-                  <a:srgbClr val="152B3A"/>
-                </a:solidFill>
+              <a:rPr sz="2550" b="1">
+                <a:solidFill>
+                  <a:srgbClr val="28685E"/>
+                </a:solidFill>
+                <a:latin typeface="Arial"/>
+                <a:ea typeface="Arial"/>
+                <a:cs typeface="Arial"/>
               </a:rPr>
               <a:t>Do the labels match the chosen action?</a:t>
             </a:r>
@@ -5986,7 +6651,7 @@
     <p:bg>
       <p:bgPr>
         <a:solidFill xmlns:a="http://schemas.openxmlformats.org/drawingml/2006/main">
-          <a:srgbClr val="F5F1E8"/>
+          <a:srgbClr val="FBF9F3"/>
         </a:solidFill>
       </p:bgPr>
     </p:bg>
@@ -6015,8 +6680,8 @@
         </p:nvSpPr>
         <p:spPr>
           <a:xfrm xmlns:a="http://schemas.openxmlformats.org/drawingml/2006/main">
-            <a:off x="609600" y="552450"/>
-            <a:ext cx="781050" cy="57150"/>
+            <a:off x="609600" y="742950"/>
+            <a:ext cx="9906000" cy="38100"/>
           </a:xfrm>
           <a:prstGeom xmlns:a="http://schemas.openxmlformats.org/drawingml/2006/main" prst="rect">
             <a:avLst/>
@@ -6046,8 +6711,8 @@
         </p:nvSpPr>
         <p:spPr>
           <a:xfrm xmlns:a="http://schemas.openxmlformats.org/drawingml/2006/main">
-            <a:off x="609600" y="762000"/>
-            <a:ext cx="9334500" cy="285750"/>
+            <a:off x="609600" y="342900"/>
+            <a:ext cx="9334500" cy="266700"/>
           </a:xfrm>
           <a:prstGeom xmlns:a="http://schemas.openxmlformats.org/drawingml/2006/main" prst="rect">
             <a:avLst/>
@@ -6059,21 +6724,30 @@
           </a:ln>
         </p:spPr>
         <p:txBody>
-          <a:bodyPr xmlns:a="http://schemas.openxmlformats.org/drawingml/2006/main" lIns="0" tIns="0" rIns="0" bIns="0" anchor="ctr"/>
+          <a:bodyPr xmlns:a="http://schemas.openxmlformats.org/drawingml/2006/main" wrap="square" lIns="0" tIns="0" rIns="0" bIns="0" anchor="ctr">
+            <a:noAutofit/>
+          </a:bodyPr>
           <a:lstStyle xmlns:a="http://schemas.openxmlformats.org/drawingml/2006/main"/>
           <a:p xmlns:a="http://schemas.openxmlformats.org/drawingml/2006/main">
             <a:pPr>
-              <a:defRPr sz="1500" b="1">
+              <a:buNone/>
+              <a:defRPr sz="1425" b="1">
                 <a:solidFill>
                   <a:srgbClr val="28685E"/>
                 </a:solidFill>
+                <a:latin typeface="Arial"/>
+                <a:ea typeface="Arial"/>
+                <a:cs typeface="Arial"/>
               </a:defRPr>
             </a:pPr>
             <a:r>
-              <a:rPr sz="1500" b="1">
+              <a:rPr sz="1425" b="1">
                 <a:solidFill>
                   <a:srgbClr val="28685E"/>
                 </a:solidFill>
+                <a:latin typeface="Arial"/>
+                <a:ea typeface="Arial"/>
+                <a:cs typeface="Arial"/>
               </a:rPr>
               <a:t>MADE BY MATT  /  BUILD SCIENCE</a:t>
             </a:r>
@@ -6082,14 +6756,14 @@
       </p:sp>
       <p:pic>
         <p:nvPicPr>
-          <p:cNvPr id="14" name=""/>
+          <p:cNvPr id="16" name=""/>
           <p:cNvPicPr>
             <a:picLocks xmlns:a="http://schemas.openxmlformats.org/drawingml/2006/main" noChangeAspect="1"/>
           </p:cNvPicPr>
           <p:nvPr/>
         </p:nvPicPr>
         <p:blipFill>
-          <a:blip xmlns:r="http://schemas.openxmlformats.org/officeDocument/2006/relationships" xmlns:a="http://schemas.openxmlformats.org/drawingml/2006/main" r:embed="R8d3ae76f8c384f44"/>
+          <a:blip xmlns:r="http://schemas.openxmlformats.org/officeDocument/2006/relationships" xmlns:a="http://schemas.openxmlformats.org/drawingml/2006/main" r:embed="R6d4e4d37638c4375"/>
           <a:stretch xmlns:a="http://schemas.openxmlformats.org/drawingml/2006/main"/>
         </p:blipFill>
         <p:spPr>
@@ -6118,8 +6792,8 @@
         </p:nvSpPr>
         <p:spPr>
           <a:xfrm xmlns:a="http://schemas.openxmlformats.org/drawingml/2006/main">
-            <a:off x="609600" y="1352550"/>
-            <a:ext cx="10972800" cy="952500"/>
+            <a:off x="609600" y="1047750"/>
+            <a:ext cx="10972800" cy="895350"/>
           </a:xfrm>
           <a:prstGeom xmlns:a="http://schemas.openxmlformats.org/drawingml/2006/main" prst="rect">
             <a:avLst/>
@@ -6131,21 +6805,30 @@
           </a:ln>
         </p:spPr>
         <p:txBody>
-          <a:bodyPr xmlns:a="http://schemas.openxmlformats.org/drawingml/2006/main" lIns="0" tIns="0" rIns="0" bIns="0" anchor="ctr"/>
+          <a:bodyPr xmlns:a="http://schemas.openxmlformats.org/drawingml/2006/main" wrap="square" lIns="0" tIns="0" rIns="0" bIns="0" anchor="ctr">
+            <a:noAutofit/>
+          </a:bodyPr>
           <a:lstStyle xmlns:a="http://schemas.openxmlformats.org/drawingml/2006/main"/>
           <a:p xmlns:a="http://schemas.openxmlformats.org/drawingml/2006/main">
             <a:pPr>
-              <a:defRPr sz="3750" b="1">
+              <a:buNone/>
+              <a:defRPr sz="3600" b="1">
                 <a:solidFill>
                   <a:srgbClr val="152B3A"/>
                 </a:solidFill>
+                <a:latin typeface="Arial"/>
+                <a:ea typeface="Arial"/>
+                <a:cs typeface="Arial"/>
               </a:defRPr>
             </a:pPr>
             <a:r>
-              <a:rPr sz="3750" b="1">
+              <a:rPr sz="3600" b="1">
                 <a:solidFill>
                   <a:srgbClr val="152B3A"/>
                 </a:solidFill>
+                <a:latin typeface="Arial"/>
+                <a:ea typeface="Arial"/>
+                <a:cs typeface="Arial"/>
               </a:rPr>
               <a:t>Improve, explain and tidy</a:t>
             </a:r>
@@ -6212,21 +6895,30 @@
           </a:ln>
         </p:spPr>
         <p:txBody>
-          <a:bodyPr xmlns:a="http://schemas.openxmlformats.org/drawingml/2006/main" lIns="0" tIns="0" rIns="0" bIns="0" anchor="ctr"/>
+          <a:bodyPr xmlns:a="http://schemas.openxmlformats.org/drawingml/2006/main" wrap="square" lIns="0" tIns="0" rIns="0" bIns="0" anchor="ctr">
+            <a:noAutofit/>
+          </a:bodyPr>
           <a:lstStyle xmlns:a="http://schemas.openxmlformats.org/drawingml/2006/main"/>
           <a:p xmlns:a="http://schemas.openxmlformats.org/drawingml/2006/main">
             <a:pPr>
-              <a:defRPr sz="1275" b="0">
+              <a:buNone/>
+              <a:defRPr sz="1200" b="0">
                 <a:solidFill>
                   <a:srgbClr val="50616B"/>
                 </a:solidFill>
+                <a:latin typeface="Arial"/>
+                <a:ea typeface="Arial"/>
+                <a:cs typeface="Arial"/>
               </a:defRPr>
             </a:pPr>
             <a:r>
-              <a:rPr sz="1275" b="0">
+              <a:rPr sz="1200" b="0">
                 <a:solidFill>
                   <a:srgbClr val="50616B"/>
                 </a:solidFill>
+                <a:latin typeface="Arial"/>
+                <a:ea typeface="Arial"/>
+                <a:cs typeface="Arial"/>
               </a:rPr>
               <a:t>AUTUMN 1  ·  WEEK 4  ·  LESSON B</a:t>
             </a:r>
@@ -6262,14 +6954,20 @@
           </a:ln>
         </p:spPr>
         <p:txBody>
-          <a:bodyPr xmlns:a="http://schemas.openxmlformats.org/drawingml/2006/main" lIns="0" tIns="0" rIns="0" bIns="0" anchor="ctr"/>
+          <a:bodyPr xmlns:a="http://schemas.openxmlformats.org/drawingml/2006/main" wrap="square" lIns="0" tIns="0" rIns="0" bIns="0" anchor="ctr">
+            <a:noAutofit/>
+          </a:bodyPr>
           <a:lstStyle xmlns:a="http://schemas.openxmlformats.org/drawingml/2006/main"/>
           <a:p xmlns:a="http://schemas.openxmlformats.org/drawingml/2006/main">
             <a:pPr>
+              <a:buNone/>
               <a:defRPr sz="1350" b="1">
                 <a:solidFill>
                   <a:srgbClr val="28685E"/>
                 </a:solidFill>
+                <a:latin typeface="Arial"/>
+                <a:ea typeface="Arial"/>
+                <a:cs typeface="Arial"/>
               </a:defRPr>
             </a:pPr>
             <a:r>
@@ -6277,6 +6975,9 @@
                 <a:solidFill>
                   <a:srgbClr val="28685E"/>
                 </a:solidFill>
+                <a:latin typeface="Arial"/>
+                <a:ea typeface="Arial"/>
+                <a:cs typeface="Arial"/>
               </a:rPr>
               <a:t>08</a:t>
             </a:r>
@@ -6299,8 +7000,8 @@
         </p:nvSpPr>
         <p:spPr>
           <a:xfrm xmlns:a="http://schemas.openxmlformats.org/drawingml/2006/main">
-            <a:off x="609600" y="2619375"/>
-            <a:ext cx="10972800" cy="714375"/>
+            <a:off x="609600" y="2305050"/>
+            <a:ext cx="10972800" cy="704850"/>
           </a:xfrm>
           <a:prstGeom xmlns:a="http://schemas.openxmlformats.org/drawingml/2006/main" prst="rect">
             <a:avLst/>
@@ -6312,14 +7013,20 @@
           </a:ln>
         </p:spPr>
         <p:txBody>
-          <a:bodyPr xmlns:a="http://schemas.openxmlformats.org/drawingml/2006/main" lIns="0" tIns="0" rIns="0" bIns="0" anchor="ctr"/>
+          <a:bodyPr xmlns:a="http://schemas.openxmlformats.org/drawingml/2006/main" wrap="square" lIns="0" tIns="0" rIns="0" bIns="0" anchor="ctr">
+            <a:noAutofit/>
+          </a:bodyPr>
           <a:lstStyle xmlns:a="http://schemas.openxmlformats.org/drawingml/2006/main"/>
           <a:p xmlns:a="http://schemas.openxmlformats.org/drawingml/2006/main">
             <a:pPr>
+              <a:buNone/>
               <a:defRPr sz="2550" b="0">
                 <a:solidFill>
                   <a:srgbClr val="152B3A"/>
                 </a:solidFill>
+                <a:latin typeface="Arial"/>
+                <a:ea typeface="Arial"/>
+                <a:cs typeface="Arial"/>
               </a:defRPr>
             </a:pPr>
             <a:r>
@@ -6327,6 +7034,9 @@
                 <a:solidFill>
                   <a:srgbClr val="152B3A"/>
                 </a:solidFill>
+                <a:latin typeface="Arial"/>
+                <a:ea typeface="Arial"/>
+                <a:cs typeface="Arial"/>
               </a:rPr>
               <a:t>Fix one label or join with the adult.</a:t>
             </a:r>
@@ -6349,8 +7059,8 @@
         </p:nvSpPr>
         <p:spPr>
           <a:xfrm xmlns:a="http://schemas.openxmlformats.org/drawingml/2006/main">
-            <a:off x="609600" y="3409950"/>
-            <a:ext cx="10972800" cy="714375"/>
+            <a:off x="609600" y="3143250"/>
+            <a:ext cx="10972800" cy="704850"/>
           </a:xfrm>
           <a:prstGeom xmlns:a="http://schemas.openxmlformats.org/drawingml/2006/main" prst="rect">
             <a:avLst/>
@@ -6362,14 +7072,20 @@
           </a:ln>
         </p:spPr>
         <p:txBody>
-          <a:bodyPr xmlns:a="http://schemas.openxmlformats.org/drawingml/2006/main" lIns="0" tIns="0" rIns="0" bIns="0" anchor="ctr"/>
+          <a:bodyPr xmlns:a="http://schemas.openxmlformats.org/drawingml/2006/main" wrap="square" lIns="0" tIns="0" rIns="0" bIns="0" anchor="ctr">
+            <a:noAutofit/>
+          </a:bodyPr>
           <a:lstStyle xmlns:a="http://schemas.openxmlformats.org/drawingml/2006/main"/>
           <a:p xmlns:a="http://schemas.openxmlformats.org/drawingml/2006/main">
             <a:pPr>
+              <a:buNone/>
               <a:defRPr sz="2550" b="0">
                 <a:solidFill>
                   <a:srgbClr val="152B3A"/>
                 </a:solidFill>
+                <a:latin typeface="Arial"/>
+                <a:ea typeface="Arial"/>
+                <a:cs typeface="Arial"/>
               </a:defRPr>
             </a:pPr>
             <a:r>
@@ -6377,6 +7093,9 @@
                 <a:solidFill>
                   <a:srgbClr val="152B3A"/>
                 </a:solidFill>
+                <a:latin typeface="Arial"/>
+                <a:ea typeface="Arial"/>
+                <a:cs typeface="Arial"/>
               </a:rPr>
               <a:t>Show or direct both actions again.</a:t>
             </a:r>
@@ -6399,8 +7118,8 @@
         </p:nvSpPr>
         <p:spPr>
           <a:xfrm xmlns:a="http://schemas.openxmlformats.org/drawingml/2006/main">
-            <a:off x="609600" y="4200525"/>
-            <a:ext cx="10972800" cy="714375"/>
+            <a:off x="609600" y="3981450"/>
+            <a:ext cx="10972800" cy="704850"/>
           </a:xfrm>
           <a:prstGeom xmlns:a="http://schemas.openxmlformats.org/drawingml/2006/main" prst="rect">
             <a:avLst/>
@@ -6412,14 +7131,20 @@
           </a:ln>
         </p:spPr>
         <p:txBody>
-          <a:bodyPr xmlns:a="http://schemas.openxmlformats.org/drawingml/2006/main" lIns="0" tIns="0" rIns="0" bIns="0" anchor="ctr"/>
+          <a:bodyPr xmlns:a="http://schemas.openxmlformats.org/drawingml/2006/main" wrap="square" lIns="0" tIns="0" rIns="0" bIns="0" anchor="ctr">
+            <a:noAutofit/>
+          </a:bodyPr>
           <a:lstStyle xmlns:a="http://schemas.openxmlformats.org/drawingml/2006/main"/>
           <a:p xmlns:a="http://schemas.openxmlformats.org/drawingml/2006/main">
             <a:pPr>
+              <a:buNone/>
               <a:defRPr sz="2550" b="0">
                 <a:solidFill>
                   <a:srgbClr val="152B3A"/>
                 </a:solidFill>
+                <a:latin typeface="Arial"/>
+                <a:ea typeface="Arial"/>
+                <a:cs typeface="Arial"/>
               </a:defRPr>
             </a:pPr>
             <a:r>
@@ -6427,6 +7152,9 @@
                 <a:solidFill>
                   <a:srgbClr val="152B3A"/>
                 </a:solidFill>
+                <a:latin typeface="Arial"/>
+                <a:ea typeface="Arial"/>
+                <a:cs typeface="Arial"/>
               </a:rPr>
               <a:t>Name one way this differs from a real arm.</a:t>
             </a:r>
@@ -6449,8 +7177,8 @@
         </p:nvSpPr>
         <p:spPr>
           <a:xfrm xmlns:a="http://schemas.openxmlformats.org/drawingml/2006/main">
-            <a:off x="609600" y="4991100"/>
-            <a:ext cx="10972800" cy="714375"/>
+            <a:off x="609600" y="4819650"/>
+            <a:ext cx="10972800" cy="704850"/>
           </a:xfrm>
           <a:prstGeom xmlns:a="http://schemas.openxmlformats.org/drawingml/2006/main" prst="rect">
             <a:avLst/>
@@ -6462,21 +7190,30 @@
           </a:ln>
         </p:spPr>
         <p:txBody>
-          <a:bodyPr xmlns:a="http://schemas.openxmlformats.org/drawingml/2006/main" lIns="0" tIns="0" rIns="0" bIns="0" anchor="ctr"/>
+          <a:bodyPr xmlns:a="http://schemas.openxmlformats.org/drawingml/2006/main" wrap="square" lIns="0" tIns="0" rIns="0" bIns="0" anchor="ctr">
+            <a:noAutofit/>
+          </a:bodyPr>
           <a:lstStyle xmlns:a="http://schemas.openxmlformats.org/drawingml/2006/main"/>
           <a:p xmlns:a="http://schemas.openxmlformats.org/drawingml/2006/main">
             <a:pPr>
-              <a:defRPr sz="2550" b="0">
-                <a:solidFill>
-                  <a:srgbClr val="152B3A"/>
-                </a:solidFill>
+              <a:buNone/>
+              <a:defRPr sz="2550" b="1">
+                <a:solidFill>
+                  <a:srgbClr val="28685E"/>
+                </a:solidFill>
+                <a:latin typeface="Arial"/>
+                <a:ea typeface="Arial"/>
+                <a:cs typeface="Arial"/>
               </a:defRPr>
             </a:pPr>
             <a:r>
-              <a:rPr sz="2550" b="0">
-                <a:solidFill>
-                  <a:srgbClr val="152B3A"/>
-                </a:solidFill>
+              <a:rPr sz="2550" b="1">
+                <a:solidFill>
+                  <a:srgbClr val="28685E"/>
+                </a:solidFill>
+                <a:latin typeface="Arial"/>
+                <a:ea typeface="Arial"/>
+                <a:cs typeface="Arial"/>
               </a:rPr>
               <a:t>Keep your record and put the model away.</a:t>
             </a:r>
@@ -6499,7 +7236,7 @@
     <p:bg>
       <p:bgPr>
         <a:solidFill xmlns:a="http://schemas.openxmlformats.org/drawingml/2006/main">
-          <a:srgbClr val="F5F1E8"/>
+          <a:srgbClr val="FBF9F3"/>
         </a:solidFill>
       </p:bgPr>
     </p:bg>
@@ -6528,8 +7265,8 @@
         </p:nvSpPr>
         <p:spPr>
           <a:xfrm xmlns:a="http://schemas.openxmlformats.org/drawingml/2006/main">
-            <a:off x="609600" y="552450"/>
-            <a:ext cx="781050" cy="57150"/>
+            <a:off x="609600" y="742950"/>
+            <a:ext cx="9906000" cy="38100"/>
           </a:xfrm>
           <a:prstGeom xmlns:a="http://schemas.openxmlformats.org/drawingml/2006/main" prst="rect">
             <a:avLst/>
@@ -6559,8 +7296,8 @@
         </p:nvSpPr>
         <p:spPr>
           <a:xfrm xmlns:a="http://schemas.openxmlformats.org/drawingml/2006/main">
-            <a:off x="609600" y="762000"/>
-            <a:ext cx="9334500" cy="285750"/>
+            <a:off x="609600" y="342900"/>
+            <a:ext cx="9334500" cy="266700"/>
           </a:xfrm>
           <a:prstGeom xmlns:a="http://schemas.openxmlformats.org/drawingml/2006/main" prst="rect">
             <a:avLst/>
@@ -6572,21 +7309,30 @@
           </a:ln>
         </p:spPr>
         <p:txBody>
-          <a:bodyPr xmlns:a="http://schemas.openxmlformats.org/drawingml/2006/main" lIns="0" tIns="0" rIns="0" bIns="0" anchor="ctr"/>
+          <a:bodyPr xmlns:a="http://schemas.openxmlformats.org/drawingml/2006/main" wrap="square" lIns="0" tIns="0" rIns="0" bIns="0" anchor="ctr">
+            <a:noAutofit/>
+          </a:bodyPr>
           <a:lstStyle xmlns:a="http://schemas.openxmlformats.org/drawingml/2006/main"/>
           <a:p xmlns:a="http://schemas.openxmlformats.org/drawingml/2006/main">
             <a:pPr>
-              <a:defRPr sz="1500" b="1">
+              <a:buNone/>
+              <a:defRPr sz="1425" b="1">
                 <a:solidFill>
                   <a:srgbClr val="28685E"/>
                 </a:solidFill>
+                <a:latin typeface="Arial"/>
+                <a:ea typeface="Arial"/>
+                <a:cs typeface="Arial"/>
               </a:defRPr>
             </a:pPr>
             <a:r>
-              <a:rPr sz="1500" b="1">
+              <a:rPr sz="1425" b="1">
                 <a:solidFill>
                   <a:srgbClr val="28685E"/>
                 </a:solidFill>
+                <a:latin typeface="Arial"/>
+                <a:ea typeface="Arial"/>
+                <a:cs typeface="Arial"/>
               </a:rPr>
               <a:t>MADE BY MATT  /  BUILD SCIENCE</a:t>
             </a:r>
@@ -6595,14 +7341,14 @@
       </p:sp>
       <p:pic>
         <p:nvPicPr>
-          <p:cNvPr id="14" name=""/>
+          <p:cNvPr id="16" name=""/>
           <p:cNvPicPr>
             <a:picLocks xmlns:a="http://schemas.openxmlformats.org/drawingml/2006/main" noChangeAspect="1"/>
           </p:cNvPicPr>
           <p:nvPr/>
         </p:nvPicPr>
         <p:blipFill>
-          <a:blip xmlns:r="http://schemas.openxmlformats.org/officeDocument/2006/relationships" xmlns:a="http://schemas.openxmlformats.org/drawingml/2006/main" r:embed="R00af99b064464e6a"/>
+          <a:blip xmlns:r="http://schemas.openxmlformats.org/officeDocument/2006/relationships" xmlns:a="http://schemas.openxmlformats.org/drawingml/2006/main" r:embed="R9e5853d8c1044e26"/>
           <a:stretch xmlns:a="http://schemas.openxmlformats.org/drawingml/2006/main"/>
         </p:blipFill>
         <p:spPr>
@@ -6631,8 +7377,8 @@
         </p:nvSpPr>
         <p:spPr>
           <a:xfrm xmlns:a="http://schemas.openxmlformats.org/drawingml/2006/main">
-            <a:off x="609600" y="1352550"/>
-            <a:ext cx="10972800" cy="952500"/>
+            <a:off x="609600" y="1047750"/>
+            <a:ext cx="10972800" cy="895350"/>
           </a:xfrm>
           <a:prstGeom xmlns:a="http://schemas.openxmlformats.org/drawingml/2006/main" prst="rect">
             <a:avLst/>
@@ -6644,21 +7390,30 @@
           </a:ln>
         </p:spPr>
         <p:txBody>
-          <a:bodyPr xmlns:a="http://schemas.openxmlformats.org/drawingml/2006/main" lIns="0" tIns="0" rIns="0" bIns="0" anchor="ctr"/>
+          <a:bodyPr xmlns:a="http://schemas.openxmlformats.org/drawingml/2006/main" wrap="square" lIns="0" tIns="0" rIns="0" bIns="0" anchor="ctr">
+            <a:noAutofit/>
+          </a:bodyPr>
           <a:lstStyle xmlns:a="http://schemas.openxmlformats.org/drawingml/2006/main"/>
           <a:p xmlns:a="http://schemas.openxmlformats.org/drawingml/2006/main">
             <a:pPr>
-              <a:defRPr sz="3750" b="1">
+              <a:buNone/>
+              <a:defRPr sz="3600" b="1">
                 <a:solidFill>
                   <a:srgbClr val="152B3A"/>
                 </a:solidFill>
+                <a:latin typeface="Arial"/>
+                <a:ea typeface="Arial"/>
+                <a:cs typeface="Arial"/>
               </a:defRPr>
             </a:pPr>
             <a:r>
-              <a:rPr sz="3750" b="1">
+              <a:rPr sz="3600" b="1">
                 <a:solidFill>
                   <a:srgbClr val="152B3A"/>
                 </a:solidFill>
+                <a:latin typeface="Arial"/>
+                <a:ea typeface="Arial"/>
+                <a:cs typeface="Arial"/>
               </a:rPr>
               <a:t>Your voice can change the lesson</a:t>
             </a:r>
@@ -6725,21 +7480,30 @@
           </a:ln>
         </p:spPr>
         <p:txBody>
-          <a:bodyPr xmlns:a="http://schemas.openxmlformats.org/drawingml/2006/main" lIns="0" tIns="0" rIns="0" bIns="0" anchor="ctr"/>
+          <a:bodyPr xmlns:a="http://schemas.openxmlformats.org/drawingml/2006/main" wrap="square" lIns="0" tIns="0" rIns="0" bIns="0" anchor="ctr">
+            <a:noAutofit/>
+          </a:bodyPr>
           <a:lstStyle xmlns:a="http://schemas.openxmlformats.org/drawingml/2006/main"/>
           <a:p xmlns:a="http://schemas.openxmlformats.org/drawingml/2006/main">
             <a:pPr>
-              <a:defRPr sz="1275" b="0">
+              <a:buNone/>
+              <a:defRPr sz="1200" b="0">
                 <a:solidFill>
                   <a:srgbClr val="50616B"/>
                 </a:solidFill>
+                <a:latin typeface="Arial"/>
+                <a:ea typeface="Arial"/>
+                <a:cs typeface="Arial"/>
               </a:defRPr>
             </a:pPr>
             <a:r>
-              <a:rPr sz="1275" b="0">
+              <a:rPr sz="1200" b="0">
                 <a:solidFill>
                   <a:srgbClr val="50616B"/>
                 </a:solidFill>
+                <a:latin typeface="Arial"/>
+                <a:ea typeface="Arial"/>
+                <a:cs typeface="Arial"/>
               </a:rPr>
               <a:t>AUTUMN 1  ·  WEEK 4  ·  LESSON B</a:t>
             </a:r>
@@ -6775,14 +7539,20 @@
           </a:ln>
         </p:spPr>
         <p:txBody>
-          <a:bodyPr xmlns:a="http://schemas.openxmlformats.org/drawingml/2006/main" lIns="0" tIns="0" rIns="0" bIns="0" anchor="ctr"/>
+          <a:bodyPr xmlns:a="http://schemas.openxmlformats.org/drawingml/2006/main" wrap="square" lIns="0" tIns="0" rIns="0" bIns="0" anchor="ctr">
+            <a:noAutofit/>
+          </a:bodyPr>
           <a:lstStyle xmlns:a="http://schemas.openxmlformats.org/drawingml/2006/main"/>
           <a:p xmlns:a="http://schemas.openxmlformats.org/drawingml/2006/main">
             <a:pPr>
+              <a:buNone/>
               <a:defRPr sz="1350" b="1">
                 <a:solidFill>
                   <a:srgbClr val="28685E"/>
                 </a:solidFill>
+                <a:latin typeface="Arial"/>
+                <a:ea typeface="Arial"/>
+                <a:cs typeface="Arial"/>
               </a:defRPr>
             </a:pPr>
             <a:r>
@@ -6790,6 +7560,9 @@
                 <a:solidFill>
                   <a:srgbClr val="28685E"/>
                 </a:solidFill>
+                <a:latin typeface="Arial"/>
+                <a:ea typeface="Arial"/>
+                <a:cs typeface="Arial"/>
               </a:rPr>
               <a:t>09</a:t>
             </a:r>
@@ -6812,8 +7585,8 @@
         </p:nvSpPr>
         <p:spPr>
           <a:xfrm xmlns:a="http://schemas.openxmlformats.org/drawingml/2006/main">
-            <a:off x="609600" y="2619375"/>
-            <a:ext cx="10972800" cy="714375"/>
+            <a:off x="609600" y="2305050"/>
+            <a:ext cx="10972800" cy="704850"/>
           </a:xfrm>
           <a:prstGeom xmlns:a="http://schemas.openxmlformats.org/drawingml/2006/main" prst="rect">
             <a:avLst/>
@@ -6825,14 +7598,20 @@
           </a:ln>
         </p:spPr>
         <p:txBody>
-          <a:bodyPr xmlns:a="http://schemas.openxmlformats.org/drawingml/2006/main" lIns="0" tIns="0" rIns="0" bIns="0" anchor="ctr"/>
+          <a:bodyPr xmlns:a="http://schemas.openxmlformats.org/drawingml/2006/main" wrap="square" lIns="0" tIns="0" rIns="0" bIns="0" anchor="ctr">
+            <a:noAutofit/>
+          </a:bodyPr>
           <a:lstStyle xmlns:a="http://schemas.openxmlformats.org/drawingml/2006/main"/>
           <a:p xmlns:a="http://schemas.openxmlformats.org/drawingml/2006/main">
             <a:pPr>
+              <a:buNone/>
               <a:defRPr sz="2550" b="0">
                 <a:solidFill>
                   <a:srgbClr val="152B3A"/>
                 </a:solidFill>
+                <a:latin typeface="Arial"/>
+                <a:ea typeface="Arial"/>
+                <a:cs typeface="Arial"/>
               </a:defRPr>
             </a:pPr>
             <a:r>
@@ -6840,6 +7619,9 @@
                 <a:solidFill>
                   <a:srgbClr val="152B3A"/>
                 </a:solidFill>
+                <a:latin typeface="Arial"/>
+                <a:ea typeface="Arial"/>
+                <a:cs typeface="Arial"/>
               </a:rPr>
               <a:t>What helped you join in?</a:t>
             </a:r>
@@ -6862,8 +7644,8 @@
         </p:nvSpPr>
         <p:spPr>
           <a:xfrm xmlns:a="http://schemas.openxmlformats.org/drawingml/2006/main">
-            <a:off x="609600" y="3409950"/>
-            <a:ext cx="10972800" cy="714375"/>
+            <a:off x="609600" y="3143250"/>
+            <a:ext cx="10972800" cy="704850"/>
           </a:xfrm>
           <a:prstGeom xmlns:a="http://schemas.openxmlformats.org/drawingml/2006/main" prst="rect">
             <a:avLst/>
@@ -6875,14 +7657,20 @@
           </a:ln>
         </p:spPr>
         <p:txBody>
-          <a:bodyPr xmlns:a="http://schemas.openxmlformats.org/drawingml/2006/main" lIns="0" tIns="0" rIns="0" bIns="0" anchor="ctr"/>
+          <a:bodyPr xmlns:a="http://schemas.openxmlformats.org/drawingml/2006/main" wrap="square" lIns="0" tIns="0" rIns="0" bIns="0" anchor="ctr">
+            <a:noAutofit/>
+          </a:bodyPr>
           <a:lstStyle xmlns:a="http://schemas.openxmlformats.org/drawingml/2006/main"/>
           <a:p xmlns:a="http://schemas.openxmlformats.org/drawingml/2006/main">
             <a:pPr>
+              <a:buNone/>
               <a:defRPr sz="2550" b="0">
                 <a:solidFill>
                   <a:srgbClr val="152B3A"/>
                 </a:solidFill>
+                <a:latin typeface="Arial"/>
+                <a:ea typeface="Arial"/>
+                <a:cs typeface="Arial"/>
               </a:defRPr>
             </a:pPr>
             <a:r>
@@ -6890,6 +7678,9 @@
                 <a:solidFill>
                   <a:srgbClr val="152B3A"/>
                 </a:solidFill>
+                <a:latin typeface="Arial"/>
+                <a:ea typeface="Arial"/>
+                <a:cs typeface="Arial"/>
               </a:rPr>
               <a:t>What could make the next activity easier?</a:t>
             </a:r>
@@ -6912,8 +7703,8 @@
         </p:nvSpPr>
         <p:spPr>
           <a:xfrm xmlns:a="http://schemas.openxmlformats.org/drawingml/2006/main">
-            <a:off x="609600" y="4200525"/>
-            <a:ext cx="10972800" cy="714375"/>
+            <a:off x="609600" y="3981450"/>
+            <a:ext cx="10972800" cy="704850"/>
           </a:xfrm>
           <a:prstGeom xmlns:a="http://schemas.openxmlformats.org/drawingml/2006/main" prst="rect">
             <a:avLst/>
@@ -6925,14 +7716,20 @@
           </a:ln>
         </p:spPr>
         <p:txBody>
-          <a:bodyPr xmlns:a="http://schemas.openxmlformats.org/drawingml/2006/main" lIns="0" tIns="0" rIns="0" bIns="0" anchor="ctr"/>
+          <a:bodyPr xmlns:a="http://schemas.openxmlformats.org/drawingml/2006/main" wrap="square" lIns="0" tIns="0" rIns="0" bIns="0" anchor="ctr">
+            <a:noAutofit/>
+          </a:bodyPr>
           <a:lstStyle xmlns:a="http://schemas.openxmlformats.org/drawingml/2006/main"/>
           <a:p xmlns:a="http://schemas.openxmlformats.org/drawingml/2006/main">
             <a:pPr>
+              <a:buNone/>
               <a:defRPr sz="2550" b="0">
                 <a:solidFill>
                   <a:srgbClr val="152B3A"/>
                 </a:solidFill>
+                <a:latin typeface="Arial"/>
+                <a:ea typeface="Arial"/>
+                <a:cs typeface="Arial"/>
               </a:defRPr>
             </a:pPr>
             <a:r>
@@ -6940,6 +7737,9 @@
                 <a:solidFill>
                   <a:srgbClr val="152B3A"/>
                 </a:solidFill>
+                <a:latin typeface="Arial"/>
+                <a:ea typeface="Arial"/>
+                <a:cs typeface="Arial"/>
               </a:rPr>
               <a:t>Point, sign, speak, write or pass privately.</a:t>
             </a:r>
@@ -6962,8 +7762,8 @@
         </p:nvSpPr>
         <p:spPr>
           <a:xfrm xmlns:a="http://schemas.openxmlformats.org/drawingml/2006/main">
-            <a:off x="609600" y="4991100"/>
-            <a:ext cx="10972800" cy="714375"/>
+            <a:off x="609600" y="4819650"/>
+            <a:ext cx="10972800" cy="704850"/>
           </a:xfrm>
           <a:prstGeom xmlns:a="http://schemas.openxmlformats.org/drawingml/2006/main" prst="rect">
             <a:avLst/>
@@ -6975,21 +7775,30 @@
           </a:ln>
         </p:spPr>
         <p:txBody>
-          <a:bodyPr xmlns:a="http://schemas.openxmlformats.org/drawingml/2006/main" lIns="0" tIns="0" rIns="0" bIns="0" anchor="ctr"/>
+          <a:bodyPr xmlns:a="http://schemas.openxmlformats.org/drawingml/2006/main" wrap="square" lIns="0" tIns="0" rIns="0" bIns="0" anchor="ctr">
+            <a:noAutofit/>
+          </a:bodyPr>
           <a:lstStyle xmlns:a="http://schemas.openxmlformats.org/drawingml/2006/main"/>
           <a:p xmlns:a="http://schemas.openxmlformats.org/drawingml/2006/main">
             <a:pPr>
-              <a:defRPr sz="2550" b="0">
-                <a:solidFill>
-                  <a:srgbClr val="152B3A"/>
-                </a:solidFill>
+              <a:buNone/>
+              <a:defRPr sz="2550" b="1">
+                <a:solidFill>
+                  <a:srgbClr val="28685E"/>
+                </a:solidFill>
+                <a:latin typeface="Arial"/>
+                <a:ea typeface="Arial"/>
+                <a:cs typeface="Arial"/>
               </a:defRPr>
             </a:pPr>
             <a:r>
-              <a:rPr sz="2550" b="0">
-                <a:solidFill>
-                  <a:srgbClr val="152B3A"/>
-                </a:solidFill>
+              <a:rPr sz="2550" b="1">
+                <a:solidFill>
+                  <a:srgbClr val="28685E"/>
+                </a:solidFill>
+                <a:latin typeface="Arial"/>
+                <a:ea typeface="Arial"/>
+                <a:cs typeface="Arial"/>
               </a:rPr>
               <a:t>Adult: agree one change and explain any limit.</a:t>
             </a:r>
